--- a/downloads/朱砂助手插件安装教程.pptx
+++ b/downloads/朱砂助手插件安装教程.pptx
@@ -17,6 +17,7 @@
     <p:sldId id="265" r:id="rId16"/>
     <p:sldId id="266" r:id="rId17"/>
     <p:sldId id="267" r:id="rId18"/>
+    <p:sldId id="268" r:id="rId19"/>
   </p:sldIdLst>
   <p:sldSz cx="12192000" cy="6858000" type="screen4x3"/>
   <p:notesSz cx="6858000" cy="9144000"/>
@@ -3143,53 +3144,9 @@
           </a:p>
         </p:txBody>
       </p:sp>
-      <p:sp>
-        <p:nvSpPr>
-          <p:cNvPr id="3" name="Rectangle 2"/>
-          <p:cNvSpPr/>
-          <p:nvPr/>
-        </p:nvSpPr>
-        <p:spPr>
-          <a:xfrm>
-            <a:off x="0" y="0"/>
-            <a:ext cx="12191695" cy="6858000"/>
-          </a:xfrm>
-          <a:prstGeom prst="rect">
-            <a:avLst/>
-          </a:prstGeom>
-          <a:solidFill>
-            <a:srgbClr val="18110E"/>
-          </a:solidFill>
-          <a:ln>
-            <a:noFill/>
-          </a:ln>
-          <a:effectLst/>
-        </p:spPr>
-        <p:style>
-          <a:lnRef idx="1">
-            <a:schemeClr val="accent1"/>
-          </a:lnRef>
-          <a:fillRef idx="3">
-            <a:schemeClr val="accent1"/>
-          </a:fillRef>
-          <a:effectRef idx="2">
-            <a:schemeClr val="accent1"/>
-          </a:effectRef>
-          <a:fontRef idx="minor">
-            <a:schemeClr val="lt1"/>
-          </a:fontRef>
-        </p:style>
-        <p:txBody>
-          <a:bodyPr rtlCol="0" anchor="ctr"/>
-          <a:lstStyle/>
-          <a:p>
-            <a:pPr algn="ctr"/>
-          </a:p>
-        </p:txBody>
-      </p:sp>
       <p:cxnSp>
         <p:nvCxnSpPr>
-          <p:cNvPr id="4" name="Connector 3"/>
+          <p:cNvPr id="3" name="Connector 2"/>
           <p:cNvCxnSpPr/>
           <p:nvPr/>
         </p:nvCxnSpPr>
@@ -3224,7 +3181,7 @@
       </p:cxnSp>
       <p:sp>
         <p:nvSpPr>
-          <p:cNvPr id="5" name="TextBox 4"/>
+          <p:cNvPr id="4" name="TextBox 3"/>
           <p:cNvSpPr txBox="1"/>
           <p:nvPr/>
         </p:nvSpPr>
@@ -3259,14 +3216,14 @@
       </p:sp>
       <p:sp>
         <p:nvSpPr>
-          <p:cNvPr id="6" name="TextBox 5"/>
+          <p:cNvPr id="5" name="TextBox 4"/>
           <p:cNvSpPr txBox="1"/>
           <p:nvPr/>
         </p:nvSpPr>
         <p:spPr>
           <a:xfrm>
-            <a:off x="822960" y="1965960"/>
-            <a:ext cx="10515600" cy="1645920"/>
+            <a:off x="822960" y="1874519"/>
+            <a:ext cx="10515600" cy="1828800"/>
           </a:xfrm>
           <a:prstGeom prst="rect">
             <a:avLst/>
@@ -3280,7 +3237,7 @@
           <a:lstStyle/>
           <a:p>
             <a:r>
-              <a:rPr sz="5400" b="1" i="0">
+              <a:rPr sz="5200" b="1" i="0">
                 <a:solidFill>
                   <a:srgbClr val="F2E9D6"/>
                 </a:solidFill>
@@ -3292,7 +3249,7 @@
           </a:p>
           <a:p>
             <a:r>
-              <a:rPr sz="5400" b="1" i="0">
+              <a:rPr sz="5200" b="1" i="0">
                 <a:solidFill>
                   <a:srgbClr val="C9A85F"/>
                 </a:solidFill>
@@ -3306,14 +3263,14 @@
       </p:sp>
       <p:sp>
         <p:nvSpPr>
-          <p:cNvPr id="7" name="TextBox 6"/>
+          <p:cNvPr id="6" name="TextBox 5"/>
           <p:cNvSpPr txBox="1"/>
           <p:nvPr/>
         </p:nvSpPr>
         <p:spPr>
           <a:xfrm>
-            <a:off x="841248" y="4114800"/>
-            <a:ext cx="10058400" cy="548640"/>
+            <a:off x="841248" y="4069080"/>
+            <a:ext cx="10515600" cy="548640"/>
           </a:xfrm>
           <a:prstGeom prst="rect">
             <a:avLst/>
@@ -3354,20 +3311,20 @@
                 <a:latin typeface="Songti SC"/>
                 <a:ea typeface="Songti SC"/>
               </a:rPr>
-              <a:t>住宅 IP 更安全 · 零门槛起步</a:t>
+              <a:t>住宅 IP 更安全 · 零门槛</a:t>
             </a:r>
           </a:p>
         </p:txBody>
       </p:sp>
       <p:cxnSp>
         <p:nvCxnSpPr>
-          <p:cNvPr id="8" name="Connector 7"/>
+          <p:cNvPr id="7" name="Connector 6"/>
           <p:cNvCxnSpPr/>
           <p:nvPr/>
         </p:nvCxnSpPr>
         <p:spPr>
           <a:xfrm>
-            <a:off x="841248" y="4892040"/>
+            <a:off x="841248" y="4846320"/>
             <a:ext cx="3657600" cy="0"/>
           </a:xfrm>
           <a:prstGeom prst="bentConnector3">
@@ -3396,13 +3353,13 @@
       </p:cxnSp>
       <p:sp>
         <p:nvSpPr>
-          <p:cNvPr id="9" name="TextBox 8"/>
+          <p:cNvPr id="8" name="TextBox 7"/>
           <p:cNvSpPr txBox="1"/>
           <p:nvPr/>
         </p:nvSpPr>
         <p:spPr>
           <a:xfrm>
-            <a:off x="841248" y="5029200"/>
+            <a:off x="841248" y="4983480"/>
             <a:ext cx="10058400" cy="457200"/>
           </a:xfrm>
           <a:prstGeom prst="rect">
@@ -3424,7 +3381,7 @@
                 <a:latin typeface="Microsoft YaHei"/>
                 <a:ea typeface="Microsoft YaHei"/>
               </a:rPr>
-              <a:t>电脑版 Chrome / Edge  ·  3 分钟装好  ·  v1</a:t>
+              <a:t>电脑版 Chrome / Edge  ·  含产品截图 · 逐步详解  ·  v1</a:t>
             </a:r>
           </a:p>
         </p:txBody>
@@ -3499,8 +3456,8 @@
         </p:nvSpPr>
         <p:spPr>
           <a:xfrm>
-            <a:off x="566928" y="457200"/>
-            <a:ext cx="5486400" cy="457200"/>
+            <a:off x="566928" y="384048"/>
+            <a:ext cx="6400800" cy="457200"/>
           </a:xfrm>
           <a:prstGeom prst="rect">
             <a:avLst/>
@@ -3564,7 +3521,7 @@
         </p:nvCxnSpPr>
         <p:spPr>
           <a:xfrm>
-            <a:off x="566928" y="1051560"/>
+            <a:off x="566928" y="1024128"/>
             <a:ext cx="11064239" cy="0"/>
           </a:xfrm>
           <a:prstGeom prst="bentConnector3">
@@ -3599,8 +3556,8 @@
         </p:nvSpPr>
         <p:spPr>
           <a:xfrm>
-            <a:off x="566928" y="1234440"/>
-            <a:ext cx="10607040" cy="457200"/>
+            <a:off x="566928" y="1188720"/>
+            <a:ext cx="10607040" cy="365760"/>
           </a:xfrm>
           <a:prstGeom prst="rect">
             <a:avLst/>
@@ -3621,7 +3578,7 @@
                 <a:latin typeface="Times New Roman"/>
                 <a:ea typeface="Times New Roman"/>
               </a:rPr>
-              <a:t>STEP 07 · 下发任务</a:t>
+              <a:t>STEP 07 · 建计划下发</a:t>
             </a:r>
           </a:p>
         </p:txBody>
@@ -3634,8 +3591,8 @@
         </p:nvSpPr>
         <p:spPr>
           <a:xfrm>
-            <a:off x="566928" y="1600200"/>
-            <a:ext cx="10607040" cy="822960"/>
+            <a:off x="566928" y="1536192"/>
+            <a:ext cx="10607040" cy="731520"/>
           </a:xfrm>
           <a:prstGeom prst="rect">
             <a:avLst/>
@@ -3649,14 +3606,14 @@
           <a:lstStyle/>
           <a:p>
             <a:r>
-              <a:rPr sz="3000" b="1" i="0">
+              <a:rPr sz="2800" b="1" i="0">
                 <a:solidFill>
                   <a:srgbClr val="F2E9D6"/>
                 </a:solidFill>
                 <a:latin typeface="Songti SC"/>
                 <a:ea typeface="Songti SC"/>
               </a:rPr>
-              <a:t>第七步：建计划并下发执行</a:t>
+              <a:t>第七步：建养号/截流计划并下发</a:t>
             </a:r>
           </a:p>
         </p:txBody>
@@ -3669,8 +3626,8 @@
         </p:nvSpPr>
         <p:spPr>
           <a:xfrm>
-            <a:off x="640080" y="2697480"/>
-            <a:ext cx="384048" cy="384048"/>
+            <a:off x="640080" y="2514600"/>
+            <a:ext cx="365760" cy="365760"/>
           </a:xfrm>
           <a:prstGeom prst="ellipse">
             <a:avLst/>
@@ -3703,7 +3660,7 @@
           <a:p>
             <a:pPr algn="ctr"/>
             <a:r>
-              <a:rPr sz="1500" b="1" i="0">
+              <a:rPr sz="1400" b="1" i="0">
                 <a:solidFill>
                   <a:srgbClr val="18110E"/>
                 </a:solidFill>
@@ -3723,8 +3680,8 @@
         </p:nvSpPr>
         <p:spPr>
           <a:xfrm>
-            <a:off x="1234440" y="2642616"/>
-            <a:ext cx="10241280" cy="822960"/>
+            <a:off x="1188720" y="2468880"/>
+            <a:ext cx="5029200" cy="914400"/>
           </a:xfrm>
           <a:prstGeom prst="rect">
             <a:avLst/>
@@ -3738,31 +3695,31 @@
           <a:lstStyle/>
           <a:p>
             <a:r>
-              <a:rPr sz="1600" b="1" i="0">
+              <a:rPr sz="1500" b="1" i="0">
                 <a:solidFill>
                   <a:srgbClr val="F2E9D6"/>
                 </a:solidFill>
                 <a:latin typeface="Microsoft YaHei"/>
                 <a:ea typeface="Microsoft YaHei"/>
               </a:rPr>
-              <a:t>去「养号 / 截流计划」新建计划</a:t>
+              <a:t>进「养号/截流计划」新建计划</a:t>
             </a:r>
           </a:p>
           <a:p>
             <a:pPr>
               <a:lnSpc>
-                <a:spcPct val="125000"/>
+                <a:spcPct val="120000"/>
               </a:lnSpc>
             </a:pPr>
             <a:r>
-              <a:rPr sz="1300" b="0" i="0">
+              <a:rPr sz="1200" b="0" i="0">
                 <a:solidFill>
                   <a:srgbClr val="C3B498"/>
                 </a:solidFill>
                 <a:latin typeface="Microsoft YaHei"/>
                 <a:ea typeface="Microsoft YaHei"/>
               </a:rPr>
-              <a:t>选养号或截流，填关键词、各项互动比例，保存。</a:t>
+              <a:t>选养号或截流，填关键词、各项互动比例（见右图）。</a:t>
             </a:r>
           </a:p>
         </p:txBody>
@@ -3775,8 +3732,8 @@
         </p:nvSpPr>
         <p:spPr>
           <a:xfrm>
-            <a:off x="640080" y="3566160"/>
-            <a:ext cx="384048" cy="384048"/>
+            <a:off x="640080" y="3355848"/>
+            <a:ext cx="365760" cy="365760"/>
           </a:xfrm>
           <a:prstGeom prst="ellipse">
             <a:avLst/>
@@ -3809,7 +3766,7 @@
           <a:p>
             <a:pPr algn="ctr"/>
             <a:r>
-              <a:rPr sz="1500" b="1" i="0">
+              <a:rPr sz="1400" b="1" i="0">
                 <a:solidFill>
                   <a:srgbClr val="18110E"/>
                 </a:solidFill>
@@ -3829,8 +3786,8 @@
         </p:nvSpPr>
         <p:spPr>
           <a:xfrm>
-            <a:off x="1234440" y="3511296"/>
-            <a:ext cx="10241280" cy="822960"/>
+            <a:off x="1188720" y="3310128"/>
+            <a:ext cx="5029200" cy="914400"/>
           </a:xfrm>
           <a:prstGeom prst="rect">
             <a:avLst/>
@@ -3844,7 +3801,7 @@
           <a:lstStyle/>
           <a:p>
             <a:r>
-              <a:rPr sz="1600" b="1" i="0">
+              <a:rPr sz="1500" b="1" i="0">
                 <a:solidFill>
                   <a:srgbClr val="F2E9D6"/>
                 </a:solidFill>
@@ -3857,18 +3814,18 @@
           <a:p>
             <a:pPr>
               <a:lnSpc>
-                <a:spcPct val="125000"/>
+                <a:spcPct val="120000"/>
               </a:lnSpc>
             </a:pPr>
             <a:r>
-              <a:rPr sz="1300" b="0" i="0">
+              <a:rPr sz="1200" b="0" i="0">
                 <a:solidFill>
                   <a:srgbClr val="C3B498"/>
                 </a:solidFill>
                 <a:latin typeface="Microsoft YaHei"/>
                 <a:ea typeface="Microsoft YaHei"/>
               </a:rPr>
-              <a:t>任务进入设备的待领取队列。</a:t>
+              <a:t>任务进入设备待领取队列。</a:t>
             </a:r>
           </a:p>
         </p:txBody>
@@ -3881,8 +3838,8 @@
         </p:nvSpPr>
         <p:spPr>
           <a:xfrm>
-            <a:off x="640080" y="4434840"/>
-            <a:ext cx="384048" cy="384048"/>
+            <a:off x="640080" y="4197096"/>
+            <a:ext cx="365760" cy="365760"/>
           </a:xfrm>
           <a:prstGeom prst="ellipse">
             <a:avLst/>
@@ -3915,7 +3872,7 @@
           <a:p>
             <a:pPr algn="ctr"/>
             <a:r>
-              <a:rPr sz="1500" b="1" i="0">
+              <a:rPr sz="1400" b="1" i="0">
                 <a:solidFill>
                   <a:srgbClr val="18110E"/>
                 </a:solidFill>
@@ -3935,8 +3892,8 @@
         </p:nvSpPr>
         <p:spPr>
           <a:xfrm>
-            <a:off x="1234440" y="4379976"/>
-            <a:ext cx="10241280" cy="822960"/>
+            <a:off x="1188720" y="4151376"/>
+            <a:ext cx="5029200" cy="914400"/>
           </a:xfrm>
           <a:prstGeom prst="rect">
             <a:avLst/>
@@ -3950,7 +3907,7 @@
           <a:lstStyle/>
           <a:p>
             <a:r>
-              <a:rPr sz="1600" b="1" i="0">
+              <a:rPr sz="1500" b="1" i="0">
                 <a:solidFill>
                   <a:srgbClr val="F2E9D6"/>
                 </a:solidFill>
@@ -3963,18 +3920,18 @@
           <a:p>
             <a:pPr>
               <a:lnSpc>
-                <a:spcPct val="125000"/>
+                <a:spcPct val="120000"/>
               </a:lnSpc>
             </a:pPr>
             <a:r>
-              <a:rPr sz="1300" b="0" i="0">
+              <a:rPr sz="1200" b="0" i="0">
                 <a:solidFill>
                   <a:srgbClr val="C3B498"/>
                 </a:solidFill>
                 <a:latin typeface="Microsoft YaHei"/>
                 <a:ea typeface="Microsoft YaHei"/>
               </a:rPr>
-              <a:t>休息中→工作中即已开始；出验证码会自动停止。</a:t>
+              <a:t>休息中→工作中即已开始。</a:t>
             </a:r>
           </a:p>
         </p:txBody>
@@ -3987,8 +3944,8 @@
         </p:nvSpPr>
         <p:spPr>
           <a:xfrm>
-            <a:off x="566928" y="5806440"/>
-            <a:ext cx="11064240" cy="566928"/>
+            <a:off x="6656832" y="2414016"/>
+            <a:ext cx="4791456" cy="3767328"/>
           </a:xfrm>
           <a:prstGeom prst="rect">
             <a:avLst/>
@@ -4025,15 +3982,85 @@
           </a:p>
         </p:txBody>
       </p:sp>
-      <p:sp>
-        <p:nvSpPr>
-          <p:cNvPr id="14" name="TextBox 13"/>
+      <p:pic>
+        <p:nvPicPr>
+          <p:cNvPr id="14" name="Picture 13" descr="s_plan.png"/>
+          <p:cNvPicPr>
+            <a:picLocks noChangeAspect="1"/>
+          </p:cNvPicPr>
+          <p:nvPr/>
+        </p:nvPicPr>
+        <p:blipFill>
+          <a:blip r:embed="rId2"/>
+          <a:stretch>
+            <a:fillRect/>
+          </a:stretch>
+        </p:blipFill>
+        <p:spPr>
+          <a:xfrm>
+            <a:off x="6711696" y="2468880"/>
+            <a:ext cx="4681728" cy="3657600"/>
+          </a:xfrm>
+          <a:prstGeom prst="rect">
+            <a:avLst/>
+          </a:prstGeom>
+        </p:spPr>
+      </p:pic>
+      <p:sp>
+        <p:nvSpPr>
+          <p:cNvPr id="15" name="Rectangle 14"/>
+          <p:cNvSpPr/>
+          <p:nvPr/>
+        </p:nvSpPr>
+        <p:spPr>
+          <a:xfrm>
+            <a:off x="566928" y="5943600"/>
+            <a:ext cx="11064240" cy="548640"/>
+          </a:xfrm>
+          <a:prstGeom prst="rect">
+            <a:avLst/>
+          </a:prstGeom>
+          <a:solidFill>
+            <a:srgbClr val="241B16"/>
+          </a:solidFill>
+          <a:ln w="12700">
+            <a:solidFill>
+              <a:srgbClr val="C9A85F"/>
+            </a:solidFill>
+          </a:ln>
+          <a:effectLst/>
+        </p:spPr>
+        <p:style>
+          <a:lnRef idx="1">
+            <a:schemeClr val="accent1"/>
+          </a:lnRef>
+          <a:fillRef idx="3">
+            <a:schemeClr val="accent1"/>
+          </a:fillRef>
+          <a:effectRef idx="2">
+            <a:schemeClr val="accent1"/>
+          </a:effectRef>
+          <a:fontRef idx="minor">
+            <a:schemeClr val="lt1"/>
+          </a:fontRef>
+        </p:style>
+        <p:txBody>
+          <a:bodyPr rtlCol="0" anchor="ctr"/>
+          <a:lstStyle/>
+          <a:p>
+            <a:pPr algn="ctr"/>
+          </a:p>
+        </p:txBody>
+      </p:sp>
+      <p:sp>
+        <p:nvSpPr>
+          <p:cNvPr id="16" name="TextBox 15"/>
           <p:cNvSpPr txBox="1"/>
           <p:nvPr/>
         </p:nvSpPr>
         <p:spPr>
           <a:xfrm>
-            <a:off x="777240" y="5907024"/>
+            <a:off x="777240" y="6035040"/>
             <a:ext cx="10698480" cy="457200"/>
           </a:xfrm>
           <a:prstGeom prst="rect">
@@ -4058,14 +4085,50 @@
               <a:t>⚠ </a:t>
             </a:r>
             <a:r>
-              <a:rPr sz="1250" b="0" i="0">
+              <a:rPr sz="1200" b="0" i="0">
                 <a:solidFill>
                   <a:srgbClr val="F2E9D6"/>
                 </a:solidFill>
                 <a:latin typeface="Microsoft YaHei"/>
                 <a:ea typeface="Microsoft YaHei"/>
               </a:rPr>
-              <a:t>自动互动属平台灰色操作，请保守低频：默认只养号，截流回复/私信尽量 0 或极低频。</a:t>
+              <a:t>自动互动属灰色操作，请保守低频：默认只养号，截流回复/私信尽量 0。</a:t>
+            </a:r>
+          </a:p>
+        </p:txBody>
+      </p:sp>
+      <p:sp>
+        <p:nvSpPr>
+          <p:cNvPr id="17" name="TextBox 16"/>
+          <p:cNvSpPr txBox="1"/>
+          <p:nvPr/>
+        </p:nvSpPr>
+        <p:spPr>
+          <a:xfrm>
+            <a:off x="10881360" y="6400800"/>
+            <a:ext cx="914400" cy="365760"/>
+          </a:xfrm>
+          <a:prstGeom prst="rect">
+            <a:avLst/>
+          </a:prstGeom>
+          <a:noFill/>
+        </p:spPr>
+        <p:txBody>
+          <a:bodyPr wrap="square" lIns="0" rIns="0" tIns="0" bIns="0">
+            <a:spAutoFit/>
+          </a:bodyPr>
+          <a:lstStyle/>
+          <a:p>
+            <a:pPr algn="r"/>
+            <a:r>
+              <a:rPr sz="1000" b="1" i="0">
+                <a:solidFill>
+                  <a:srgbClr val="C9A85F"/>
+                </a:solidFill>
+                <a:latin typeface="Times New Roman"/>
+                <a:ea typeface="Times New Roman"/>
+              </a:rPr>
+              <a:t>09</a:t>
             </a:r>
           </a:p>
         </p:txBody>
@@ -4140,8 +4203,8 @@
         </p:nvSpPr>
         <p:spPr>
           <a:xfrm>
-            <a:off x="566928" y="457200"/>
-            <a:ext cx="5486400" cy="457200"/>
+            <a:off x="566928" y="384048"/>
+            <a:ext cx="6400800" cy="457200"/>
           </a:xfrm>
           <a:prstGeom prst="rect">
             <a:avLst/>
@@ -4205,7 +4268,7 @@
         </p:nvCxnSpPr>
         <p:spPr>
           <a:xfrm>
-            <a:off x="566928" y="1051560"/>
+            <a:off x="566928" y="1024128"/>
             <a:ext cx="11064239" cy="0"/>
           </a:xfrm>
           <a:prstGeom prst="bentConnector3">
@@ -4240,8 +4303,8 @@
         </p:nvSpPr>
         <p:spPr>
           <a:xfrm>
-            <a:off x="566928" y="1234440"/>
-            <a:ext cx="10607040" cy="457200"/>
+            <a:off x="566928" y="1188720"/>
+            <a:ext cx="10607040" cy="365760"/>
           </a:xfrm>
           <a:prstGeom prst="rect">
             <a:avLst/>
@@ -4262,7 +4325,7 @@
                 <a:latin typeface="Times New Roman"/>
                 <a:ea typeface="Times New Roman"/>
               </a:rPr>
-              <a:t>FAQ · 常见问题</a:t>
+              <a:t>MONITOR · 设备看板</a:t>
             </a:r>
           </a:p>
         </p:txBody>
@@ -4275,8 +4338,8 @@
         </p:nvSpPr>
         <p:spPr>
           <a:xfrm>
-            <a:off x="566928" y="1600200"/>
-            <a:ext cx="10607040" cy="822960"/>
+            <a:off x="566928" y="1536192"/>
+            <a:ext cx="10607040" cy="731520"/>
           </a:xfrm>
           <a:prstGeom prst="rect">
             <a:avLst/>
@@ -4290,14 +4353,14 @@
           <a:lstStyle/>
           <a:p>
             <a:r>
-              <a:rPr sz="3000" b="1" i="0">
+              <a:rPr sz="2800" b="1" i="0">
                 <a:solidFill>
                   <a:srgbClr val="F2E9D6"/>
                 </a:solidFill>
                 <a:latin typeface="Songti SC"/>
                 <a:ea typeface="Songti SC"/>
               </a:rPr>
-              <a:t>装不上 / 掉线？先看这几条</a:t>
+              <a:t>在「设备看板」实时盯执行</a:t>
             </a:r>
           </a:p>
         </p:txBody>
@@ -4310,8 +4373,8 @@
         </p:nvSpPr>
         <p:spPr>
           <a:xfrm>
-            <a:off x="640080" y="2697480"/>
-            <a:ext cx="384048" cy="384048"/>
+            <a:off x="640080" y="2514600"/>
+            <a:ext cx="365760" cy="365760"/>
           </a:xfrm>
           <a:prstGeom prst="ellipse">
             <a:avLst/>
@@ -4344,7 +4407,7 @@
           <a:p>
             <a:pPr algn="ctr"/>
             <a:r>
-              <a:rPr sz="1500" b="1" i="0">
+              <a:rPr sz="1400" b="1" i="0">
                 <a:solidFill>
                   <a:srgbClr val="18110E"/>
                 </a:solidFill>
@@ -4364,8 +4427,8 @@
         </p:nvSpPr>
         <p:spPr>
           <a:xfrm>
-            <a:off x="1234440" y="2642616"/>
-            <a:ext cx="10241280" cy="822960"/>
+            <a:off x="1188720" y="2468880"/>
+            <a:ext cx="5029200" cy="914400"/>
           </a:xfrm>
           <a:prstGeom prst="rect">
             <a:avLst/>
@@ -4379,31 +4442,31 @@
           <a:lstStyle/>
           <a:p>
             <a:r>
-              <a:rPr sz="1600" b="1" i="0">
+              <a:rPr sz="1500" b="1" i="0">
                 <a:solidFill>
                   <a:srgbClr val="F2E9D6"/>
                 </a:solidFill>
                 <a:latin typeface="Microsoft YaHei"/>
                 <a:ea typeface="Microsoft YaHei"/>
               </a:rPr>
-              <a:t>装完又消失 / 失效</a:t>
+              <a:t>每台在线设备一张卡</a:t>
             </a:r>
           </a:p>
           <a:p>
             <a:pPr>
               <a:lnSpc>
-                <a:spcPct val="125000"/>
+                <a:spcPct val="120000"/>
               </a:lnSpc>
             </a:pPr>
             <a:r>
-              <a:rPr sz="1300" b="0" i="0">
+              <a:rPr sz="1200" b="0" i="0">
                 <a:solidFill>
                   <a:srgbClr val="C3B498"/>
                 </a:solidFill>
                 <a:latin typeface="Microsoft YaHei"/>
                 <a:ea typeface="Microsoft YaHei"/>
               </a:rPr>
-              <a:t>多半是解压文件夹被删或移动了——放固定目录后重新加载即可。</a:t>
+              <a:t>显示名称、状态（休息中/工作中/离线）。</a:t>
             </a:r>
           </a:p>
         </p:txBody>
@@ -4416,8 +4479,8 @@
         </p:nvSpPr>
         <p:spPr>
           <a:xfrm>
-            <a:off x="640080" y="3566160"/>
-            <a:ext cx="384048" cy="384048"/>
+            <a:off x="640080" y="3355848"/>
+            <a:ext cx="365760" cy="365760"/>
           </a:xfrm>
           <a:prstGeom prst="ellipse">
             <a:avLst/>
@@ -4450,7 +4513,7 @@
           <a:p>
             <a:pPr algn="ctr"/>
             <a:r>
-              <a:rPr sz="1500" b="1" i="0">
+              <a:rPr sz="1400" b="1" i="0">
                 <a:solidFill>
                   <a:srgbClr val="18110E"/>
                 </a:solidFill>
@@ -4470,8 +4533,8 @@
         </p:nvSpPr>
         <p:spPr>
           <a:xfrm>
-            <a:off x="1234440" y="3511296"/>
-            <a:ext cx="10241280" cy="822960"/>
+            <a:off x="1188720" y="3310128"/>
+            <a:ext cx="5029200" cy="914400"/>
           </a:xfrm>
           <a:prstGeom prst="rect">
             <a:avLst/>
@@ -4485,31 +4548,31 @@
           <a:lstStyle/>
           <a:p>
             <a:r>
-              <a:rPr sz="1600" b="1" i="0">
+              <a:rPr sz="1500" b="1" i="0">
                 <a:solidFill>
                   <a:srgbClr val="F2E9D6"/>
                 </a:solidFill>
                 <a:latin typeface="Microsoft YaHei"/>
                 <a:ea typeface="Microsoft YaHei"/>
               </a:rPr>
-              <a:t>设备看板不显示本机</a:t>
+              <a:t>可编辑名称、清理离线设备</a:t>
             </a:r>
           </a:p>
           <a:p>
             <a:pPr>
               <a:lnSpc>
-                <a:spcPct val="125000"/>
+                <a:spcPct val="120000"/>
               </a:lnSpc>
             </a:pPr>
             <a:r>
-              <a:rPr sz="1300" b="0" i="0">
+              <a:rPr sz="1200" b="0" i="0">
                 <a:solidFill>
                   <a:srgbClr val="C3B498"/>
                 </a:solidFill>
                 <a:latin typeface="Microsoft YaHei"/>
                 <a:ea typeface="Microsoft YaHei"/>
               </a:rPr>
-              <a:t>确认已登录朱砂账号，且插件弹窗里「本机作为执行设备」为开。</a:t>
+              <a:t>多机农场也一目了然。</a:t>
             </a:r>
           </a:p>
         </p:txBody>
@@ -4522,8 +4585,8 @@
         </p:nvSpPr>
         <p:spPr>
           <a:xfrm>
-            <a:off x="640080" y="4434840"/>
-            <a:ext cx="384048" cy="384048"/>
+            <a:off x="640080" y="4197096"/>
+            <a:ext cx="365760" cy="365760"/>
           </a:xfrm>
           <a:prstGeom prst="ellipse">
             <a:avLst/>
@@ -4556,7 +4619,7 @@
           <a:p>
             <a:pPr algn="ctr"/>
             <a:r>
-              <a:rPr sz="1500" b="1" i="0">
+              <a:rPr sz="1400" b="1" i="0">
                 <a:solidFill>
                   <a:srgbClr val="18110E"/>
                 </a:solidFill>
@@ -4576,8 +4639,8 @@
         </p:nvSpPr>
         <p:spPr>
           <a:xfrm>
-            <a:off x="1234440" y="4379976"/>
-            <a:ext cx="10241280" cy="822960"/>
+            <a:off x="1188720" y="4151376"/>
+            <a:ext cx="5029200" cy="914400"/>
           </a:xfrm>
           <a:prstGeom prst="rect">
             <a:avLst/>
@@ -4591,54 +4654,56 @@
           <a:lstStyle/>
           <a:p>
             <a:r>
-              <a:rPr sz="1600" b="1" i="0">
+              <a:rPr sz="1500" b="1" i="0">
                 <a:solidFill>
                   <a:srgbClr val="F2E9D6"/>
                 </a:solidFill>
                 <a:latin typeface="Microsoft YaHei"/>
                 <a:ea typeface="Microsoft YaHei"/>
               </a:rPr>
-              <a:t>跑一会儿停了</a:t>
+              <a:t>出验证码会自动停止</a:t>
             </a:r>
           </a:p>
           <a:p>
             <a:pPr>
               <a:lnSpc>
-                <a:spcPct val="125000"/>
+                <a:spcPct val="120000"/>
               </a:lnSpc>
             </a:pPr>
             <a:r>
-              <a:rPr sz="1300" b="0" i="0">
+              <a:rPr sz="1200" b="0" i="0">
                 <a:solidFill>
                   <a:srgbClr val="C3B498"/>
                 </a:solidFill>
                 <a:latin typeface="Microsoft YaHei"/>
                 <a:ea typeface="Microsoft YaHei"/>
               </a:rPr>
-              <a:t>遇到验证码会自动停止，属正常保护；手动过验证后可再下发。</a:t>
-            </a:r>
-          </a:p>
-        </p:txBody>
-      </p:sp>
-      <p:sp>
-        <p:nvSpPr>
-          <p:cNvPr id="13" name="Oval 12"/>
+              <a:t>属正常保护，手动过验证后可再下发。</a:t>
+            </a:r>
+          </a:p>
+        </p:txBody>
+      </p:sp>
+      <p:sp>
+        <p:nvSpPr>
+          <p:cNvPr id="13" name="Rectangle 12"/>
           <p:cNvSpPr/>
           <p:nvPr/>
         </p:nvSpPr>
         <p:spPr>
           <a:xfrm>
-            <a:off x="640080" y="5303520"/>
-            <a:ext cx="384048" cy="384048"/>
-          </a:xfrm>
-          <a:prstGeom prst="ellipse">
+            <a:off x="6396736" y="2414016"/>
+            <a:ext cx="5311648" cy="3767328"/>
+          </a:xfrm>
+          <a:prstGeom prst="rect">
             <a:avLst/>
           </a:prstGeom>
           <a:solidFill>
-            <a:srgbClr val="C9A85F"/>
+            <a:srgbClr val="241B16"/>
           </a:solidFill>
-          <a:ln>
-            <a:noFill/>
+          <a:ln w="12700">
+            <a:solidFill>
+              <a:srgbClr val="C9A85F"/>
+            </a:solidFill>
           </a:ln>
           <a:effectLst/>
         </p:spPr>
@@ -4657,33 +4722,47 @@
           </a:fontRef>
         </p:style>
         <p:txBody>
-          <a:bodyPr rtlCol="0" anchor="ctr" tIns="0" bIns="0"/>
+          <a:bodyPr rtlCol="0" anchor="ctr"/>
           <a:lstStyle/>
           <a:p>
             <a:pPr algn="ctr"/>
-            <a:r>
-              <a:rPr sz="1500" b="1" i="0">
-                <a:solidFill>
-                  <a:srgbClr val="18110E"/>
-                </a:solidFill>
-                <a:latin typeface="Times New Roman"/>
-                <a:ea typeface="Times New Roman"/>
-              </a:rPr>
-              <a:t>4</a:t>
-            </a:r>
-          </a:p>
-        </p:txBody>
-      </p:sp>
-      <p:sp>
-        <p:nvSpPr>
-          <p:cNvPr id="14" name="TextBox 13"/>
+          </a:p>
+        </p:txBody>
+      </p:sp>
+      <p:pic>
+        <p:nvPicPr>
+          <p:cNvPr id="14" name="Picture 13" descr="s_board.png"/>
+          <p:cNvPicPr>
+            <a:picLocks noChangeAspect="1"/>
+          </p:cNvPicPr>
+          <p:nvPr/>
+        </p:nvPicPr>
+        <p:blipFill>
+          <a:blip r:embed="rId2"/>
+          <a:stretch>
+            <a:fillRect/>
+          </a:stretch>
+        </p:blipFill>
+        <p:spPr>
+          <a:xfrm>
+            <a:off x="6451600" y="2468880"/>
+            <a:ext cx="5201920" cy="3657600"/>
+          </a:xfrm>
+          <a:prstGeom prst="rect">
+            <a:avLst/>
+          </a:prstGeom>
+        </p:spPr>
+      </p:pic>
+      <p:sp>
+        <p:nvSpPr>
+          <p:cNvPr id="15" name="TextBox 14"/>
           <p:cNvSpPr txBox="1"/>
           <p:nvPr/>
         </p:nvSpPr>
         <p:spPr>
           <a:xfrm>
-            <a:off x="1234440" y="5248656"/>
-            <a:ext cx="10241280" cy="822960"/>
+            <a:off x="10881360" y="6400800"/>
+            <a:ext cx="914400" cy="365760"/>
           </a:xfrm>
           <a:prstGeom prst="rect">
             <a:avLst/>
@@ -4696,32 +4775,16 @@
           </a:bodyPr>
           <a:lstStyle/>
           <a:p>
-            <a:r>
-              <a:rPr sz="1600" b="1" i="0">
-                <a:solidFill>
-                  <a:srgbClr val="F2E9D6"/>
-                </a:solidFill>
-                <a:latin typeface="Microsoft YaHei"/>
-                <a:ea typeface="Microsoft YaHei"/>
-              </a:rPr>
-              <a:t>更新了没生效</a:t>
-            </a:r>
-          </a:p>
-          <a:p>
-            <a:pPr>
-              <a:lnSpc>
-                <a:spcPct val="125000"/>
-              </a:lnSpc>
-            </a:pPr>
-            <a:r>
-              <a:rPr sz="1300" b="0" i="0">
-                <a:solidFill>
-                  <a:srgbClr val="C3B498"/>
-                </a:solidFill>
-                <a:latin typeface="Microsoft YaHei"/>
-                <a:ea typeface="Microsoft YaHei"/>
-              </a:rPr>
-              <a:t>插件是本地加载，仓库更新后需重新下载并在扩展页「重新加载」。</a:t>
+            <a:pPr algn="r"/>
+            <a:r>
+              <a:rPr sz="1000" b="1" i="0">
+                <a:solidFill>
+                  <a:srgbClr val="C9A85F"/>
+                </a:solidFill>
+                <a:latin typeface="Times New Roman"/>
+                <a:ea typeface="Times New Roman"/>
+              </a:rPr>
+              <a:t>10</a:t>
             </a:r>
           </a:p>
         </p:txBody>
@@ -4796,8 +4859,8 @@
         </p:nvSpPr>
         <p:spPr>
           <a:xfrm>
-            <a:off x="822960" y="2103120"/>
-            <a:ext cx="10515600" cy="548640"/>
+            <a:off x="566928" y="384048"/>
+            <a:ext cx="6400800" cy="457200"/>
           </a:xfrm>
           <a:prstGeom prst="rect">
             <a:avLst/>
@@ -4811,70 +4874,65 @@
           <a:lstStyle/>
           <a:p>
             <a:r>
-              <a:rPr sz="1500" b="0" i="0" spc="500">
+              <a:rPr sz="1300" b="1" i="0">
                 <a:solidFill>
                   <a:srgbClr val="C9A85F"/>
+                </a:solidFill>
+                <a:latin typeface="Songti SC"/>
+                <a:ea typeface="Songti SC"/>
+              </a:rPr>
+              <a:t>朱砂</a:t>
+            </a:r>
+            <a:r>
+              <a:rPr sz="1300" b="0" i="0">
+                <a:solidFill>
+                  <a:srgbClr val="9C8F7C"/>
+                </a:solidFill>
+                <a:latin typeface="Songti SC"/>
+                <a:ea typeface="Songti SC"/>
+              </a:rPr>
+              <a:t> · </a:t>
+            </a:r>
+            <a:r>
+              <a:rPr sz="1300" b="1" i="0">
+                <a:solidFill>
+                  <a:srgbClr val="F2E9D6"/>
+                </a:solidFill>
+                <a:latin typeface="Songti SC"/>
+                <a:ea typeface="Songti SC"/>
+              </a:rPr>
+              <a:t>操盘台</a:t>
+            </a:r>
+            <a:r>
+              <a:rPr sz="900" b="0" i="0" spc="200">
+                <a:solidFill>
+                  <a:srgbClr val="9C8F7C"/>
                 </a:solidFill>
                 <a:latin typeface="Times New Roman"/>
                 <a:ea typeface="Times New Roman"/>
               </a:rPr>
-              <a:t>THANK  YOU</a:t>
-            </a:r>
-          </a:p>
-        </p:txBody>
-      </p:sp>
-      <p:sp>
-        <p:nvSpPr>
-          <p:cNvPr id="4" name="TextBox 3"/>
-          <p:cNvSpPr txBox="1"/>
-          <p:nvPr/>
-        </p:nvSpPr>
-        <p:spPr>
-          <a:xfrm>
-            <a:off x="822960" y="2743200"/>
-            <a:ext cx="10515600" cy="1280160"/>
-          </a:xfrm>
-          <a:prstGeom prst="rect">
-            <a:avLst/>
-          </a:prstGeom>
-          <a:noFill/>
-        </p:spPr>
-        <p:txBody>
-          <a:bodyPr wrap="square" lIns="0" rIns="0" tIns="0" bIns="0">
-            <a:spAutoFit/>
-          </a:bodyPr>
-          <a:lstStyle/>
-          <a:p>
-            <a:r>
-              <a:rPr sz="4200" b="1" i="0">
-                <a:solidFill>
-                  <a:srgbClr val="F2E9D6"/>
-                </a:solidFill>
-                <a:latin typeface="Songti SC"/>
-                <a:ea typeface="Songti SC"/>
-              </a:rPr>
-              <a:t>装好了，就去获客吧</a:t>
+              <a:t>   VERTICAL AGENT STUDIO</a:t>
             </a:r>
           </a:p>
         </p:txBody>
       </p:sp>
       <p:cxnSp>
         <p:nvCxnSpPr>
-          <p:cNvPr id="5" name="Connector 4"/>
+          <p:cNvPr id="4" name="Connector 3"/>
           <p:cNvCxnSpPr/>
           <p:nvPr/>
         </p:nvCxnSpPr>
         <p:spPr>
           <a:xfrm>
-            <a:off x="868680" y="3794760"/>
-            <a:ext cx="2926080" cy="0"/>
+            <a:off x="566928" y="1024128"/>
+            <a:ext cx="11064239" cy="0"/>
           </a:xfrm>
           <a:prstGeom prst="bentConnector3">
             <a:avLst/>
           </a:prstGeom>
-          <a:ln w="12700">
+          <a:ln w="9525">
             <a:solidFill>
-              <a:srgbClr val="C9A85F"/>
+              <a:srgbClr val="3A2C1F"/>
             </a:solidFill>
           </a:ln>
         </p:spPr>
@@ -4895,14 +4953,14 @@
       </p:cxnSp>
       <p:sp>
         <p:nvSpPr>
-          <p:cNvPr id="6" name="TextBox 5"/>
+          <p:cNvPr id="5" name="TextBox 4"/>
           <p:cNvSpPr txBox="1"/>
           <p:nvPr/>
         </p:nvSpPr>
         <p:spPr>
           <a:xfrm>
-            <a:off x="868680" y="4023360"/>
-            <a:ext cx="10058400" cy="914400"/>
+            <a:off x="566928" y="1188720"/>
+            <a:ext cx="10607040" cy="365760"/>
           </a:xfrm>
           <a:prstGeom prst="rect">
             <a:avLst/>
@@ -4916,26 +4974,759 @@
           <a:lstStyle/>
           <a:p>
             <a:r>
-              <a:rPr sz="1500" b="0" i="0">
-                <a:solidFill>
-                  <a:srgbClr val="C3B498"/>
+              <a:rPr sz="1200" b="0" i="0" spc="300">
+                <a:solidFill>
+                  <a:srgbClr val="C9A85F"/>
+                </a:solidFill>
+                <a:latin typeface="Times New Roman"/>
+                <a:ea typeface="Times New Roman"/>
+              </a:rPr>
+              <a:t>FAQ · 常见问题</a:t>
+            </a:r>
+          </a:p>
+        </p:txBody>
+      </p:sp>
+      <p:sp>
+        <p:nvSpPr>
+          <p:cNvPr id="6" name="TextBox 5"/>
+          <p:cNvSpPr txBox="1"/>
+          <p:nvPr/>
+        </p:nvSpPr>
+        <p:spPr>
+          <a:xfrm>
+            <a:off x="566928" y="1536192"/>
+            <a:ext cx="10607040" cy="731520"/>
+          </a:xfrm>
+          <a:prstGeom prst="rect">
+            <a:avLst/>
+          </a:prstGeom>
+          <a:noFill/>
+        </p:spPr>
+        <p:txBody>
+          <a:bodyPr wrap="square" lIns="0" rIns="0" tIns="0" bIns="0">
+            <a:spAutoFit/>
+          </a:bodyPr>
+          <a:lstStyle/>
+          <a:p>
+            <a:r>
+              <a:rPr sz="2800" b="1" i="0">
+                <a:solidFill>
+                  <a:srgbClr val="F2E9D6"/>
+                </a:solidFill>
+                <a:latin typeface="Songti SC"/>
+                <a:ea typeface="Songti SC"/>
+              </a:rPr>
+              <a:t>装不上 / 掉线？先看这几条</a:t>
+            </a:r>
+          </a:p>
+        </p:txBody>
+      </p:sp>
+      <p:sp>
+        <p:nvSpPr>
+          <p:cNvPr id="7" name="Oval 6"/>
+          <p:cNvSpPr/>
+          <p:nvPr/>
+        </p:nvSpPr>
+        <p:spPr>
+          <a:xfrm>
+            <a:off x="640080" y="2514600"/>
+            <a:ext cx="365760" cy="365760"/>
+          </a:xfrm>
+          <a:prstGeom prst="ellipse">
+            <a:avLst/>
+          </a:prstGeom>
+          <a:solidFill>
+            <a:srgbClr val="C9A85F"/>
+          </a:solidFill>
+          <a:ln>
+            <a:noFill/>
+          </a:ln>
+          <a:effectLst/>
+        </p:spPr>
+        <p:style>
+          <a:lnRef idx="1">
+            <a:schemeClr val="accent1"/>
+          </a:lnRef>
+          <a:fillRef idx="3">
+            <a:schemeClr val="accent1"/>
+          </a:fillRef>
+          <a:effectRef idx="2">
+            <a:schemeClr val="accent1"/>
+          </a:effectRef>
+          <a:fontRef idx="minor">
+            <a:schemeClr val="lt1"/>
+          </a:fontRef>
+        </p:style>
+        <p:txBody>
+          <a:bodyPr rtlCol="0" anchor="ctr" tIns="0" bIns="0"/>
+          <a:lstStyle/>
+          <a:p>
+            <a:pPr algn="ctr"/>
+            <a:r>
+              <a:rPr sz="1400" b="1" i="0">
+                <a:solidFill>
+                  <a:srgbClr val="18110E"/>
+                </a:solidFill>
+                <a:latin typeface="Times New Roman"/>
+                <a:ea typeface="Times New Roman"/>
+              </a:rPr>
+              <a:t>1</a:t>
+            </a:r>
+          </a:p>
+        </p:txBody>
+      </p:sp>
+      <p:sp>
+        <p:nvSpPr>
+          <p:cNvPr id="8" name="TextBox 7"/>
+          <p:cNvSpPr txBox="1"/>
+          <p:nvPr/>
+        </p:nvSpPr>
+        <p:spPr>
+          <a:xfrm>
+            <a:off x="1188720" y="2468880"/>
+            <a:ext cx="10332720" cy="914400"/>
+          </a:xfrm>
+          <a:prstGeom prst="rect">
+            <a:avLst/>
+          </a:prstGeom>
+          <a:noFill/>
+        </p:spPr>
+        <p:txBody>
+          <a:bodyPr wrap="square" lIns="0" rIns="0" tIns="0" bIns="0">
+            <a:spAutoFit/>
+          </a:bodyPr>
+          <a:lstStyle/>
+          <a:p>
+            <a:r>
+              <a:rPr sz="1500" b="1" i="0">
+                <a:solidFill>
+                  <a:srgbClr val="F2E9D6"/>
                 </a:solidFill>
                 <a:latin typeface="Microsoft YaHei"/>
                 <a:ea typeface="Microsoft YaHei"/>
               </a:rPr>
-              <a:t>有任何问题，点右下角「小红书助手」或到「联系客服」页加客服微信。</a:t>
-            </a:r>
-          </a:p>
-          <a:p>
-            <a:r>
-              <a:rPr sz="1300" b="0" i="0">
-                <a:solidFill>
-                  <a:srgbClr val="9C8F7C"/>
+              <a:t>装完又消失/失效</a:t>
+            </a:r>
+          </a:p>
+          <a:p>
+            <a:pPr>
+              <a:lnSpc>
+                <a:spcPct val="120000"/>
+              </a:lnSpc>
+            </a:pPr>
+            <a:r>
+              <a:rPr sz="1200" b="0" i="0">
+                <a:solidFill>
+                  <a:srgbClr val="C3B498"/>
                 </a:solidFill>
                 <a:latin typeface="Microsoft YaHei"/>
                 <a:ea typeface="Microsoft YaHei"/>
               </a:rPr>
+              <a:t>多半是解压文件夹被删或移动——放固定目录后重新加载。</a:t>
+            </a:r>
+          </a:p>
+        </p:txBody>
+      </p:sp>
+      <p:sp>
+        <p:nvSpPr>
+          <p:cNvPr id="9" name="Oval 8"/>
+          <p:cNvSpPr/>
+          <p:nvPr/>
+        </p:nvSpPr>
+        <p:spPr>
+          <a:xfrm>
+            <a:off x="640080" y="3355848"/>
+            <a:ext cx="365760" cy="365760"/>
+          </a:xfrm>
+          <a:prstGeom prst="ellipse">
+            <a:avLst/>
+          </a:prstGeom>
+          <a:solidFill>
+            <a:srgbClr val="C9A85F"/>
+          </a:solidFill>
+          <a:ln>
+            <a:noFill/>
+          </a:ln>
+          <a:effectLst/>
+        </p:spPr>
+        <p:style>
+          <a:lnRef idx="1">
+            <a:schemeClr val="accent1"/>
+          </a:lnRef>
+          <a:fillRef idx="3">
+            <a:schemeClr val="accent1"/>
+          </a:fillRef>
+          <a:effectRef idx="2">
+            <a:schemeClr val="accent1"/>
+          </a:effectRef>
+          <a:fontRef idx="minor">
+            <a:schemeClr val="lt1"/>
+          </a:fontRef>
+        </p:style>
+        <p:txBody>
+          <a:bodyPr rtlCol="0" anchor="ctr" tIns="0" bIns="0"/>
+          <a:lstStyle/>
+          <a:p>
+            <a:pPr algn="ctr"/>
+            <a:r>
+              <a:rPr sz="1400" b="1" i="0">
+                <a:solidFill>
+                  <a:srgbClr val="18110E"/>
+                </a:solidFill>
+                <a:latin typeface="Times New Roman"/>
+                <a:ea typeface="Times New Roman"/>
+              </a:rPr>
+              <a:t>2</a:t>
+            </a:r>
+          </a:p>
+        </p:txBody>
+      </p:sp>
+      <p:sp>
+        <p:nvSpPr>
+          <p:cNvPr id="10" name="TextBox 9"/>
+          <p:cNvSpPr txBox="1"/>
+          <p:nvPr/>
+        </p:nvSpPr>
+        <p:spPr>
+          <a:xfrm>
+            <a:off x="1188720" y="3310128"/>
+            <a:ext cx="10332720" cy="914400"/>
+          </a:xfrm>
+          <a:prstGeom prst="rect">
+            <a:avLst/>
+          </a:prstGeom>
+          <a:noFill/>
+        </p:spPr>
+        <p:txBody>
+          <a:bodyPr wrap="square" lIns="0" rIns="0" tIns="0" bIns="0">
+            <a:spAutoFit/>
+          </a:bodyPr>
+          <a:lstStyle/>
+          <a:p>
+            <a:r>
+              <a:rPr sz="1500" b="1" i="0">
+                <a:solidFill>
+                  <a:srgbClr val="F2E9D6"/>
+                </a:solidFill>
+                <a:latin typeface="Microsoft YaHei"/>
+                <a:ea typeface="Microsoft YaHei"/>
+              </a:rPr>
+              <a:t>设备看板不显示本机</a:t>
+            </a:r>
+          </a:p>
+          <a:p>
+            <a:pPr>
+              <a:lnSpc>
+                <a:spcPct val="120000"/>
+              </a:lnSpc>
+            </a:pPr>
+            <a:r>
+              <a:rPr sz="1200" b="0" i="0">
+                <a:solidFill>
+                  <a:srgbClr val="C3B498"/>
+                </a:solidFill>
+                <a:latin typeface="Microsoft YaHei"/>
+                <a:ea typeface="Microsoft YaHei"/>
+              </a:rPr>
+              <a:t>确认已登录朱砂账号，且插件「本机作为执行设备」为开。</a:t>
+            </a:r>
+          </a:p>
+        </p:txBody>
+      </p:sp>
+      <p:sp>
+        <p:nvSpPr>
+          <p:cNvPr id="11" name="Oval 10"/>
+          <p:cNvSpPr/>
+          <p:nvPr/>
+        </p:nvSpPr>
+        <p:spPr>
+          <a:xfrm>
+            <a:off x="640080" y="4197096"/>
+            <a:ext cx="365760" cy="365760"/>
+          </a:xfrm>
+          <a:prstGeom prst="ellipse">
+            <a:avLst/>
+          </a:prstGeom>
+          <a:solidFill>
+            <a:srgbClr val="C9A85F"/>
+          </a:solidFill>
+          <a:ln>
+            <a:noFill/>
+          </a:ln>
+          <a:effectLst/>
+        </p:spPr>
+        <p:style>
+          <a:lnRef idx="1">
+            <a:schemeClr val="accent1"/>
+          </a:lnRef>
+          <a:fillRef idx="3">
+            <a:schemeClr val="accent1"/>
+          </a:fillRef>
+          <a:effectRef idx="2">
+            <a:schemeClr val="accent1"/>
+          </a:effectRef>
+          <a:fontRef idx="minor">
+            <a:schemeClr val="lt1"/>
+          </a:fontRef>
+        </p:style>
+        <p:txBody>
+          <a:bodyPr rtlCol="0" anchor="ctr" tIns="0" bIns="0"/>
+          <a:lstStyle/>
+          <a:p>
+            <a:pPr algn="ctr"/>
+            <a:r>
+              <a:rPr sz="1400" b="1" i="0">
+                <a:solidFill>
+                  <a:srgbClr val="18110E"/>
+                </a:solidFill>
+                <a:latin typeface="Times New Roman"/>
+                <a:ea typeface="Times New Roman"/>
+              </a:rPr>
+              <a:t>3</a:t>
+            </a:r>
+          </a:p>
+        </p:txBody>
+      </p:sp>
+      <p:sp>
+        <p:nvSpPr>
+          <p:cNvPr id="12" name="TextBox 11"/>
+          <p:cNvSpPr txBox="1"/>
+          <p:nvPr/>
+        </p:nvSpPr>
+        <p:spPr>
+          <a:xfrm>
+            <a:off x="1188720" y="4151376"/>
+            <a:ext cx="10332720" cy="914400"/>
+          </a:xfrm>
+          <a:prstGeom prst="rect">
+            <a:avLst/>
+          </a:prstGeom>
+          <a:noFill/>
+        </p:spPr>
+        <p:txBody>
+          <a:bodyPr wrap="square" lIns="0" rIns="0" tIns="0" bIns="0">
+            <a:spAutoFit/>
+          </a:bodyPr>
+          <a:lstStyle/>
+          <a:p>
+            <a:r>
+              <a:rPr sz="1500" b="1" i="0">
+                <a:solidFill>
+                  <a:srgbClr val="F2E9D6"/>
+                </a:solidFill>
+                <a:latin typeface="Microsoft YaHei"/>
+                <a:ea typeface="Microsoft YaHei"/>
+              </a:rPr>
+              <a:t>跑一会儿停了</a:t>
+            </a:r>
+          </a:p>
+          <a:p>
+            <a:pPr>
+              <a:lnSpc>
+                <a:spcPct val="120000"/>
+              </a:lnSpc>
+            </a:pPr>
+            <a:r>
+              <a:rPr sz="1200" b="0" i="0">
+                <a:solidFill>
+                  <a:srgbClr val="C3B498"/>
+                </a:solidFill>
+                <a:latin typeface="Microsoft YaHei"/>
+                <a:ea typeface="Microsoft YaHei"/>
+              </a:rPr>
+              <a:t>遇验证码自动停，属正常保护；手动过验证后可再下发。</a:t>
+            </a:r>
+          </a:p>
+        </p:txBody>
+      </p:sp>
+      <p:sp>
+        <p:nvSpPr>
+          <p:cNvPr id="13" name="Oval 12"/>
+          <p:cNvSpPr/>
+          <p:nvPr/>
+        </p:nvSpPr>
+        <p:spPr>
+          <a:xfrm>
+            <a:off x="640080" y="5038344"/>
+            <a:ext cx="365760" cy="365760"/>
+          </a:xfrm>
+          <a:prstGeom prst="ellipse">
+            <a:avLst/>
+          </a:prstGeom>
+          <a:solidFill>
+            <a:srgbClr val="C9A85F"/>
+          </a:solidFill>
+          <a:ln>
+            <a:noFill/>
+          </a:ln>
+          <a:effectLst/>
+        </p:spPr>
+        <p:style>
+          <a:lnRef idx="1">
+            <a:schemeClr val="accent1"/>
+          </a:lnRef>
+          <a:fillRef idx="3">
+            <a:schemeClr val="accent1"/>
+          </a:fillRef>
+          <a:effectRef idx="2">
+            <a:schemeClr val="accent1"/>
+          </a:effectRef>
+          <a:fontRef idx="minor">
+            <a:schemeClr val="lt1"/>
+          </a:fontRef>
+        </p:style>
+        <p:txBody>
+          <a:bodyPr rtlCol="0" anchor="ctr" tIns="0" bIns="0"/>
+          <a:lstStyle/>
+          <a:p>
+            <a:pPr algn="ctr"/>
+            <a:r>
+              <a:rPr sz="1400" b="1" i="0">
+                <a:solidFill>
+                  <a:srgbClr val="18110E"/>
+                </a:solidFill>
+                <a:latin typeface="Times New Roman"/>
+                <a:ea typeface="Times New Roman"/>
+              </a:rPr>
+              <a:t>4</a:t>
+            </a:r>
+          </a:p>
+        </p:txBody>
+      </p:sp>
+      <p:sp>
+        <p:nvSpPr>
+          <p:cNvPr id="14" name="TextBox 13"/>
+          <p:cNvSpPr txBox="1"/>
+          <p:nvPr/>
+        </p:nvSpPr>
+        <p:spPr>
+          <a:xfrm>
+            <a:off x="1188720" y="4992624"/>
+            <a:ext cx="10332720" cy="914400"/>
+          </a:xfrm>
+          <a:prstGeom prst="rect">
+            <a:avLst/>
+          </a:prstGeom>
+          <a:noFill/>
+        </p:spPr>
+        <p:txBody>
+          <a:bodyPr wrap="square" lIns="0" rIns="0" tIns="0" bIns="0">
+            <a:spAutoFit/>
+          </a:bodyPr>
+          <a:lstStyle/>
+          <a:p>
+            <a:r>
+              <a:rPr sz="1500" b="1" i="0">
+                <a:solidFill>
+                  <a:srgbClr val="F2E9D6"/>
+                </a:solidFill>
+                <a:latin typeface="Microsoft YaHei"/>
+                <a:ea typeface="Microsoft YaHei"/>
+              </a:rPr>
+              <a:t>更新了没生效</a:t>
+            </a:r>
+          </a:p>
+          <a:p>
+            <a:pPr>
+              <a:lnSpc>
+                <a:spcPct val="120000"/>
+              </a:lnSpc>
+            </a:pPr>
+            <a:r>
+              <a:rPr sz="1200" b="0" i="0">
+                <a:solidFill>
+                  <a:srgbClr val="C3B498"/>
+                </a:solidFill>
+                <a:latin typeface="Microsoft YaHei"/>
+                <a:ea typeface="Microsoft YaHei"/>
+              </a:rPr>
+              <a:t>插件本地加载，仓库更新后需重新下载并在扩展页「重新加载」。</a:t>
+            </a:r>
+          </a:p>
+        </p:txBody>
+      </p:sp>
+      <p:sp>
+        <p:nvSpPr>
+          <p:cNvPr id="15" name="TextBox 14"/>
+          <p:cNvSpPr txBox="1"/>
+          <p:nvPr/>
+        </p:nvSpPr>
+        <p:spPr>
+          <a:xfrm>
+            <a:off x="10881360" y="6400800"/>
+            <a:ext cx="914400" cy="365760"/>
+          </a:xfrm>
+          <a:prstGeom prst="rect">
+            <a:avLst/>
+          </a:prstGeom>
+          <a:noFill/>
+        </p:spPr>
+        <p:txBody>
+          <a:bodyPr wrap="square" lIns="0" rIns="0" tIns="0" bIns="0">
+            <a:spAutoFit/>
+          </a:bodyPr>
+          <a:lstStyle/>
+          <a:p>
+            <a:pPr algn="r"/>
+            <a:r>
+              <a:rPr sz="1000" b="1" i="0">
+                <a:solidFill>
+                  <a:srgbClr val="C9A85F"/>
+                </a:solidFill>
+                <a:latin typeface="Times New Roman"/>
+                <a:ea typeface="Times New Roman"/>
+              </a:rPr>
+              <a:t>11</a:t>
+            </a:r>
+          </a:p>
+        </p:txBody>
+      </p:sp>
+    </p:spTree>
+  </p:cSld>
+  <p:clrMapOvr>
+    <a:masterClrMapping/>
+  </p:clrMapOvr>
+</p:sld>
+</file>
+
+<file path=ppt/slides/slide13.xml><?xml version="1.0" encoding="utf-8"?>
+<p:sld xmlns:a="http://schemas.openxmlformats.org/drawingml/2006/main" xmlns:p="http://schemas.openxmlformats.org/presentationml/2006/main" xmlns:r="http://schemas.openxmlformats.org/officeDocument/2006/relationships">
+  <p:cSld>
+    <p:spTree>
+      <p:nvGrpSpPr>
+        <p:cNvPr id="1" name=""/>
+        <p:cNvGrpSpPr/>
+        <p:nvPr/>
+      </p:nvGrpSpPr>
+      <p:grpSpPr/>
+      <p:sp>
+        <p:nvSpPr>
+          <p:cNvPr id="2" name="Rectangle 1"/>
+          <p:cNvSpPr/>
+          <p:nvPr/>
+        </p:nvSpPr>
+        <p:spPr>
+          <a:xfrm>
+            <a:off x="0" y="0"/>
+            <a:ext cx="12192000" cy="6858000"/>
+          </a:xfrm>
+          <a:prstGeom prst="rect">
+            <a:avLst/>
+          </a:prstGeom>
+          <a:solidFill>
+            <a:srgbClr val="18110E"/>
+          </a:solidFill>
+          <a:ln>
+            <a:noFill/>
+          </a:ln>
+          <a:effectLst/>
+        </p:spPr>
+        <p:style>
+          <a:lnRef idx="1">
+            <a:schemeClr val="accent1"/>
+          </a:lnRef>
+          <a:fillRef idx="3">
+            <a:schemeClr val="accent1"/>
+          </a:fillRef>
+          <a:effectRef idx="2">
+            <a:schemeClr val="accent1"/>
+          </a:effectRef>
+          <a:fontRef idx="minor">
+            <a:schemeClr val="lt1"/>
+          </a:fontRef>
+        </p:style>
+        <p:txBody>
+          <a:bodyPr rtlCol="0" anchor="ctr"/>
+          <a:lstStyle/>
+          <a:p>
+            <a:pPr algn="ctr"/>
+          </a:p>
+        </p:txBody>
+      </p:sp>
+      <p:sp>
+        <p:nvSpPr>
+          <p:cNvPr id="3" name="TextBox 2"/>
+          <p:cNvSpPr txBox="1"/>
+          <p:nvPr/>
+        </p:nvSpPr>
+        <p:spPr>
+          <a:xfrm>
+            <a:off x="822960" y="2103120"/>
+            <a:ext cx="10515600" cy="548640"/>
+          </a:xfrm>
+          <a:prstGeom prst="rect">
+            <a:avLst/>
+          </a:prstGeom>
+          <a:noFill/>
+        </p:spPr>
+        <p:txBody>
+          <a:bodyPr wrap="square" lIns="0" rIns="0" tIns="0" bIns="0">
+            <a:spAutoFit/>
+          </a:bodyPr>
+          <a:lstStyle/>
+          <a:p>
+            <a:r>
+              <a:rPr sz="1500" b="0" i="0" spc="500">
+                <a:solidFill>
+                  <a:srgbClr val="C9A85F"/>
+                </a:solidFill>
+                <a:latin typeface="Times New Roman"/>
+                <a:ea typeface="Times New Roman"/>
+              </a:rPr>
+              <a:t>THANK  YOU</a:t>
+            </a:r>
+          </a:p>
+        </p:txBody>
+      </p:sp>
+      <p:sp>
+        <p:nvSpPr>
+          <p:cNvPr id="4" name="TextBox 3"/>
+          <p:cNvSpPr txBox="1"/>
+          <p:nvPr/>
+        </p:nvSpPr>
+        <p:spPr>
+          <a:xfrm>
+            <a:off x="822960" y="2743200"/>
+            <a:ext cx="10515600" cy="1280160"/>
+          </a:xfrm>
+          <a:prstGeom prst="rect">
+            <a:avLst/>
+          </a:prstGeom>
+          <a:noFill/>
+        </p:spPr>
+        <p:txBody>
+          <a:bodyPr wrap="square" lIns="0" rIns="0" tIns="0" bIns="0">
+            <a:spAutoFit/>
+          </a:bodyPr>
+          <a:lstStyle/>
+          <a:p>
+            <a:r>
+              <a:rPr sz="4000" b="1" i="0">
+                <a:solidFill>
+                  <a:srgbClr val="F2E9D6"/>
+                </a:solidFill>
+                <a:latin typeface="Songti SC"/>
+                <a:ea typeface="Songti SC"/>
+              </a:rPr>
+              <a:t>装好了，就去获客吧</a:t>
+            </a:r>
+          </a:p>
+        </p:txBody>
+      </p:sp>
+      <p:cxnSp>
+        <p:nvCxnSpPr>
+          <p:cNvPr id="5" name="Connector 4"/>
+          <p:cNvCxnSpPr/>
+          <p:nvPr/>
+        </p:nvCxnSpPr>
+        <p:spPr>
+          <a:xfrm>
+            <a:off x="868680" y="3749039"/>
+            <a:ext cx="2926080" cy="0"/>
+          </a:xfrm>
+          <a:prstGeom prst="bentConnector3">
+            <a:avLst/>
+          </a:prstGeom>
+          <a:ln w="12700">
+            <a:solidFill>
+              <a:srgbClr val="C9A85F"/>
+            </a:solidFill>
+          </a:ln>
+        </p:spPr>
+        <p:style>
+          <a:lnRef idx="2">
+            <a:schemeClr val="accent1"/>
+          </a:lnRef>
+          <a:fillRef idx="0">
+            <a:schemeClr val="accent1"/>
+          </a:fillRef>
+          <a:effectRef idx="1">
+            <a:schemeClr val="accent1"/>
+          </a:effectRef>
+          <a:fontRef idx="minor">
+            <a:schemeClr val="tx1"/>
+          </a:fontRef>
+        </p:style>
+      </p:cxnSp>
+      <p:sp>
+        <p:nvSpPr>
+          <p:cNvPr id="6" name="TextBox 5"/>
+          <p:cNvSpPr txBox="1"/>
+          <p:nvPr/>
+        </p:nvSpPr>
+        <p:spPr>
+          <a:xfrm>
+            <a:off x="868680" y="3977639"/>
+            <a:ext cx="10058400" cy="914400"/>
+          </a:xfrm>
+          <a:prstGeom prst="rect">
+            <a:avLst/>
+          </a:prstGeom>
+          <a:noFill/>
+        </p:spPr>
+        <p:txBody>
+          <a:bodyPr wrap="square" lIns="0" rIns="0" tIns="0" bIns="0">
+            <a:spAutoFit/>
+          </a:bodyPr>
+          <a:lstStyle/>
+          <a:p>
+            <a:r>
+              <a:rPr sz="1500" b="0" i="0">
+                <a:solidFill>
+                  <a:srgbClr val="C3B498"/>
+                </a:solidFill>
+                <a:latin typeface="Microsoft YaHei"/>
+                <a:ea typeface="Microsoft YaHei"/>
+              </a:rPr>
+              <a:t>有任何问题，点右下角「小红书助手」或到「联系客服」页加客服微信。</a:t>
+            </a:r>
+          </a:p>
+          <a:p>
+            <a:r>
+              <a:rPr sz="1300" b="0" i="0">
+                <a:solidFill>
+                  <a:srgbClr val="9C8F7C"/>
+                </a:solidFill>
+                <a:latin typeface="Microsoft YaHei"/>
+                <a:ea typeface="Microsoft YaHei"/>
+              </a:rPr>
               <a:t>操作文档 / 常见问题 / 平台规则，都在助手里。</a:t>
+            </a:r>
+          </a:p>
+        </p:txBody>
+      </p:sp>
+      <p:sp>
+        <p:nvSpPr>
+          <p:cNvPr id="7" name="TextBox 6"/>
+          <p:cNvSpPr txBox="1"/>
+          <p:nvPr/>
+        </p:nvSpPr>
+        <p:spPr>
+          <a:xfrm>
+            <a:off x="10881360" y="6400800"/>
+            <a:ext cx="914400" cy="365760"/>
+          </a:xfrm>
+          <a:prstGeom prst="rect">
+            <a:avLst/>
+          </a:prstGeom>
+          <a:noFill/>
+        </p:spPr>
+        <p:txBody>
+          <a:bodyPr wrap="square" lIns="0" rIns="0" tIns="0" bIns="0">
+            <a:spAutoFit/>
+          </a:bodyPr>
+          <a:lstStyle/>
+          <a:p>
+            <a:pPr algn="r"/>
+            <a:r>
+              <a:rPr sz="1000" b="1" i="0">
+                <a:solidFill>
+                  <a:srgbClr val="C9A85F"/>
+                </a:solidFill>
+                <a:latin typeface="Times New Roman"/>
+                <a:ea typeface="Times New Roman"/>
+              </a:rPr>
+              <a:t>12</a:t>
             </a:r>
           </a:p>
         </p:txBody>
@@ -5010,7 +5801,7 @@
         </p:nvSpPr>
         <p:spPr>
           <a:xfrm>
-            <a:off x="822960" y="1554480"/>
+            <a:off x="822960" y="1371600"/>
             <a:ext cx="5486400" cy="2194560"/>
           </a:xfrm>
           <a:prstGeom prst="rect">
@@ -5045,7 +5836,7 @@
         </p:nvSpPr>
         <p:spPr>
           <a:xfrm>
-            <a:off x="868680" y="2926080"/>
+            <a:off x="868680" y="2834640"/>
             <a:ext cx="9144000" cy="457200"/>
           </a:xfrm>
           <a:prstGeom prst="rect">
@@ -5080,7 +5871,7 @@
         </p:nvSpPr>
         <p:spPr>
           <a:xfrm>
-            <a:off x="841248" y="3383280"/>
+            <a:off x="841248" y="3291840"/>
             <a:ext cx="10058400" cy="1097280"/>
           </a:xfrm>
           <a:prstGeom prst="rect">
@@ -5095,7 +5886,7 @@
           <a:lstStyle/>
           <a:p>
             <a:r>
-              <a:rPr sz="4000" b="1" i="0">
+              <a:rPr sz="3800" b="1" i="0">
                 <a:solidFill>
                   <a:srgbClr val="F2E9D6"/>
                 </a:solidFill>
@@ -5115,7 +5906,7 @@
         </p:nvCxnSpPr>
         <p:spPr>
           <a:xfrm>
-            <a:off x="868680" y="4343400"/>
+            <a:off x="868680" y="4206240"/>
             <a:ext cx="2926080" cy="0"/>
           </a:xfrm>
           <a:prstGeom prst="bentConnector3">
@@ -5150,8 +5941,8 @@
         </p:nvSpPr>
         <p:spPr>
           <a:xfrm>
-            <a:off x="868680" y="4526280"/>
-            <a:ext cx="9601200" cy="914400"/>
+            <a:off x="868680" y="4389120"/>
+            <a:ext cx="10058400" cy="1280160"/>
           </a:xfrm>
           <a:prstGeom prst="rect">
             <a:avLst/>
@@ -5164,6 +5955,11 @@
           </a:bodyPr>
           <a:lstStyle/>
           <a:p>
+            <a:pPr>
+              <a:lnSpc>
+                <a:spcPct val="130000"/>
+              </a:lnSpc>
+            </a:pPr>
             <a:r>
               <a:rPr sz="1500" b="0" i="0">
                 <a:solidFill>
@@ -5172,8 +5968,60 @@
                 <a:latin typeface="Microsoft YaHei"/>
                 <a:ea typeface="Microsoft YaHei"/>
               </a:rPr>
-              <a:t>养号、评论区截流、发布后数据回流，都靠这个浏览器插件在你已登录的小红书里执行。
-用你本机的住宅 IP，比机房扫码更安全、登录态更稳；每 75 分钟自动续期，不易掉线。</a:t>
+              <a:t>养号、评论区截流、发布后数据回流，都靠这个浏览器插件在你已登录的小红书里执行。</a:t>
+            </a:r>
+          </a:p>
+          <a:p>
+            <a:pPr>
+              <a:lnSpc>
+                <a:spcPct val="130000"/>
+              </a:lnSpc>
+            </a:pPr>
+            <a:r>
+              <a:rPr sz="1500" b="0" i="0">
+                <a:solidFill>
+                  <a:srgbClr val="C3B498"/>
+                </a:solidFill>
+                <a:latin typeface="Microsoft YaHei"/>
+                <a:ea typeface="Microsoft YaHei"/>
+              </a:rPr>
+              <a:t>用本机住宅 IP，比机房扫码更安全、登录态更稳；每 75 分钟自动续期，不易掉线。</a:t>
+            </a:r>
+          </a:p>
+        </p:txBody>
+      </p:sp>
+      <p:sp>
+        <p:nvSpPr>
+          <p:cNvPr id="8" name="TextBox 7"/>
+          <p:cNvSpPr txBox="1"/>
+          <p:nvPr/>
+        </p:nvSpPr>
+        <p:spPr>
+          <a:xfrm>
+            <a:off x="10881360" y="6400800"/>
+            <a:ext cx="914400" cy="365760"/>
+          </a:xfrm>
+          <a:prstGeom prst="rect">
+            <a:avLst/>
+          </a:prstGeom>
+          <a:noFill/>
+        </p:spPr>
+        <p:txBody>
+          <a:bodyPr wrap="square" lIns="0" rIns="0" tIns="0" bIns="0">
+            <a:spAutoFit/>
+          </a:bodyPr>
+          <a:lstStyle/>
+          <a:p>
+            <a:pPr algn="r"/>
+            <a:r>
+              <a:rPr sz="1000" b="1" i="0">
+                <a:solidFill>
+                  <a:srgbClr val="C9A85F"/>
+                </a:solidFill>
+                <a:latin typeface="Times New Roman"/>
+                <a:ea typeface="Times New Roman"/>
+              </a:rPr>
+              <a:t>01</a:t>
             </a:r>
           </a:p>
         </p:txBody>
@@ -5248,8 +6096,8 @@
         </p:nvSpPr>
         <p:spPr>
           <a:xfrm>
-            <a:off x="566928" y="457200"/>
-            <a:ext cx="5486400" cy="457200"/>
+            <a:off x="566928" y="384048"/>
+            <a:ext cx="6400800" cy="457200"/>
           </a:xfrm>
           <a:prstGeom prst="rect">
             <a:avLst/>
@@ -5313,7 +6161,7 @@
         </p:nvCxnSpPr>
         <p:spPr>
           <a:xfrm>
-            <a:off x="566928" y="1051560"/>
+            <a:off x="566928" y="1024128"/>
             <a:ext cx="11064239" cy="0"/>
           </a:xfrm>
           <a:prstGeom prst="bentConnector3">
@@ -5348,8 +6196,8 @@
         </p:nvSpPr>
         <p:spPr>
           <a:xfrm>
-            <a:off x="566928" y="1234440"/>
-            <a:ext cx="10607040" cy="457200"/>
+            <a:off x="566928" y="1188720"/>
+            <a:ext cx="10607040" cy="365760"/>
           </a:xfrm>
           <a:prstGeom prst="rect">
             <a:avLst/>
@@ -5383,8 +6231,8 @@
         </p:nvSpPr>
         <p:spPr>
           <a:xfrm>
-            <a:off x="566928" y="1600200"/>
-            <a:ext cx="10607040" cy="822960"/>
+            <a:off x="566928" y="1536192"/>
+            <a:ext cx="10607040" cy="731520"/>
           </a:xfrm>
           <a:prstGeom prst="rect">
             <a:avLst/>
@@ -5398,7 +6246,7 @@
           <a:lstStyle/>
           <a:p>
             <a:r>
-              <a:rPr sz="3000" b="1" i="0">
+              <a:rPr sz="2800" b="1" i="0">
                 <a:solidFill>
                   <a:srgbClr val="F2E9D6"/>
                 </a:solidFill>
@@ -5418,8 +6266,8 @@
         </p:nvSpPr>
         <p:spPr>
           <a:xfrm>
-            <a:off x="640080" y="2697480"/>
-            <a:ext cx="384048" cy="384048"/>
+            <a:off x="640080" y="2514600"/>
+            <a:ext cx="365760" cy="365760"/>
           </a:xfrm>
           <a:prstGeom prst="ellipse">
             <a:avLst/>
@@ -5452,7 +6300,7 @@
           <a:p>
             <a:pPr algn="ctr"/>
             <a:r>
-              <a:rPr sz="1500" b="1" i="0">
+              <a:rPr sz="1400" b="1" i="0">
                 <a:solidFill>
                   <a:srgbClr val="18110E"/>
                 </a:solidFill>
@@ -5472,8 +6320,8 @@
         </p:nvSpPr>
         <p:spPr>
           <a:xfrm>
-            <a:off x="1234440" y="2642616"/>
-            <a:ext cx="10241280" cy="822960"/>
+            <a:off x="1188720" y="2468880"/>
+            <a:ext cx="10332720" cy="914400"/>
           </a:xfrm>
           <a:prstGeom prst="rect">
             <a:avLst/>
@@ -5487,7 +6335,7 @@
           <a:lstStyle/>
           <a:p>
             <a:r>
-              <a:rPr sz="1600" b="1" i="0">
+              <a:rPr sz="1500" b="1" i="0">
                 <a:solidFill>
                   <a:srgbClr val="F2E9D6"/>
                 </a:solidFill>
@@ -5500,11 +6348,11 @@
           <a:p>
             <a:pPr>
               <a:lnSpc>
-                <a:spcPct val="125000"/>
+                <a:spcPct val="120000"/>
               </a:lnSpc>
             </a:pPr>
             <a:r>
-              <a:rPr sz="1300" b="0" i="0">
+              <a:rPr sz="1200" b="0" i="0">
                 <a:solidFill>
                   <a:srgbClr val="C3B498"/>
                 </a:solidFill>
@@ -5524,8 +6372,8 @@
         </p:nvSpPr>
         <p:spPr>
           <a:xfrm>
-            <a:off x="640080" y="3566160"/>
-            <a:ext cx="384048" cy="384048"/>
+            <a:off x="640080" y="3355848"/>
+            <a:ext cx="365760" cy="365760"/>
           </a:xfrm>
           <a:prstGeom prst="ellipse">
             <a:avLst/>
@@ -5558,7 +6406,7 @@
           <a:p>
             <a:pPr algn="ctr"/>
             <a:r>
-              <a:rPr sz="1500" b="1" i="0">
+              <a:rPr sz="1400" b="1" i="0">
                 <a:solidFill>
                   <a:srgbClr val="18110E"/>
                 </a:solidFill>
@@ -5578,8 +6426,8 @@
         </p:nvSpPr>
         <p:spPr>
           <a:xfrm>
-            <a:off x="1234440" y="3511296"/>
-            <a:ext cx="10241280" cy="822960"/>
+            <a:off x="1188720" y="3310128"/>
+            <a:ext cx="10332720" cy="914400"/>
           </a:xfrm>
           <a:prstGeom prst="rect">
             <a:avLst/>
@@ -5593,7 +6441,7 @@
           <a:lstStyle/>
           <a:p>
             <a:r>
-              <a:rPr sz="1600" b="1" i="0">
+              <a:rPr sz="1500" b="1" i="0">
                 <a:solidFill>
                   <a:srgbClr val="F2E9D6"/>
                 </a:solidFill>
@@ -5606,18 +6454,18 @@
           <a:p>
             <a:pPr>
               <a:lnSpc>
-                <a:spcPct val="125000"/>
+                <a:spcPct val="120000"/>
               </a:lnSpc>
             </a:pPr>
             <a:r>
-              <a:rPr sz="1300" b="0" i="0">
+              <a:rPr sz="1200" b="0" i="0">
                 <a:solidFill>
                   <a:srgbClr val="C3B498"/>
                 </a:solidFill>
                 <a:latin typeface="Microsoft YaHei"/>
                 <a:ea typeface="Microsoft YaHei"/>
               </a:rPr>
-              <a:t>和插件用同一个浏览器，装好后插件会自动认这个登录态。</a:t>
+              <a:t>和插件用同一浏览器，装好后自动认这个登录态。</a:t>
             </a:r>
           </a:p>
         </p:txBody>
@@ -5630,8 +6478,8 @@
         </p:nvSpPr>
         <p:spPr>
           <a:xfrm>
-            <a:off x="640080" y="4434840"/>
-            <a:ext cx="384048" cy="384048"/>
+            <a:off x="640080" y="4197096"/>
+            <a:ext cx="365760" cy="365760"/>
           </a:xfrm>
           <a:prstGeom prst="ellipse">
             <a:avLst/>
@@ -5664,7 +6512,7 @@
           <a:p>
             <a:pPr algn="ctr"/>
             <a:r>
-              <a:rPr sz="1500" b="1" i="0">
+              <a:rPr sz="1400" b="1" i="0">
                 <a:solidFill>
                   <a:srgbClr val="18110E"/>
                 </a:solidFill>
@@ -5684,8 +6532,8 @@
         </p:nvSpPr>
         <p:spPr>
           <a:xfrm>
-            <a:off x="1234440" y="4379976"/>
-            <a:ext cx="10241280" cy="822960"/>
+            <a:off x="1188720" y="4151376"/>
+            <a:ext cx="10332720" cy="914400"/>
           </a:xfrm>
           <a:prstGeom prst="rect">
             <a:avLst/>
@@ -5699,31 +6547,67 @@
           <a:lstStyle/>
           <a:p>
             <a:r>
-              <a:rPr sz="1600" b="1" i="0">
+              <a:rPr sz="1500" b="1" i="0">
                 <a:solidFill>
                   <a:srgbClr val="F2E9D6"/>
                 </a:solidFill>
                 <a:latin typeface="Microsoft YaHei"/>
                 <a:ea typeface="Microsoft YaHei"/>
               </a:rPr>
-              <a:t>登录你要养号 / 截流的小红书账号</a:t>
+              <a:t>登录要养号/截流的小红书账号</a:t>
             </a:r>
           </a:p>
           <a:p>
             <a:pPr>
               <a:lnSpc>
-                <a:spcPct val="125000"/>
+                <a:spcPct val="120000"/>
               </a:lnSpc>
             </a:pPr>
             <a:r>
-              <a:rPr sz="1300" b="0" i="0">
+              <a:rPr sz="1200" b="0" i="0">
                 <a:solidFill>
                   <a:srgbClr val="C3B498"/>
                 </a:solidFill>
                 <a:latin typeface="Microsoft YaHei"/>
                 <a:ea typeface="Microsoft YaHei"/>
               </a:rPr>
-              <a:t>在同一浏览器打开 xiaohongshu.com 并登录，脚本就在这个登录态里跑。</a:t>
+              <a:t>同一浏览器打开 xiaohongshu.com 并登录，脚本在此登录态里跑。</a:t>
+            </a:r>
+          </a:p>
+        </p:txBody>
+      </p:sp>
+      <p:sp>
+        <p:nvSpPr>
+          <p:cNvPr id="13" name="TextBox 12"/>
+          <p:cNvSpPr txBox="1"/>
+          <p:nvPr/>
+        </p:nvSpPr>
+        <p:spPr>
+          <a:xfrm>
+            <a:off x="10881360" y="6400800"/>
+            <a:ext cx="914400" cy="365760"/>
+          </a:xfrm>
+          <a:prstGeom prst="rect">
+            <a:avLst/>
+          </a:prstGeom>
+          <a:noFill/>
+        </p:spPr>
+        <p:txBody>
+          <a:bodyPr wrap="square" lIns="0" rIns="0" tIns="0" bIns="0">
+            <a:spAutoFit/>
+          </a:bodyPr>
+          <a:lstStyle/>
+          <a:p>
+            <a:pPr algn="r"/>
+            <a:r>
+              <a:rPr sz="1000" b="1" i="0">
+                <a:solidFill>
+                  <a:srgbClr val="C9A85F"/>
+                </a:solidFill>
+                <a:latin typeface="Times New Roman"/>
+                <a:ea typeface="Times New Roman"/>
+              </a:rPr>
+              <a:t>02</a:t>
             </a:r>
           </a:p>
         </p:txBody>
@@ -5798,8 +6682,8 @@
         </p:nvSpPr>
         <p:spPr>
           <a:xfrm>
-            <a:off x="566928" y="457200"/>
-            <a:ext cx="5486400" cy="457200"/>
+            <a:off x="566928" y="384048"/>
+            <a:ext cx="6400800" cy="457200"/>
           </a:xfrm>
           <a:prstGeom prst="rect">
             <a:avLst/>
@@ -5863,7 +6747,7 @@
         </p:nvCxnSpPr>
         <p:spPr>
           <a:xfrm>
-            <a:off x="566928" y="1051560"/>
+            <a:off x="566928" y="1024128"/>
             <a:ext cx="11064239" cy="0"/>
           </a:xfrm>
           <a:prstGeom prst="bentConnector3">
@@ -5898,8 +6782,8 @@
         </p:nvSpPr>
         <p:spPr>
           <a:xfrm>
-            <a:off x="566928" y="1234440"/>
-            <a:ext cx="10607040" cy="457200"/>
+            <a:off x="566928" y="1188720"/>
+            <a:ext cx="10607040" cy="365760"/>
           </a:xfrm>
           <a:prstGeom prst="rect">
             <a:avLst/>
@@ -5933,8 +6817,8 @@
         </p:nvSpPr>
         <p:spPr>
           <a:xfrm>
-            <a:off x="566928" y="1600200"/>
-            <a:ext cx="10607040" cy="822960"/>
+            <a:off x="566928" y="1536192"/>
+            <a:ext cx="10607040" cy="731520"/>
           </a:xfrm>
           <a:prstGeom prst="rect">
             <a:avLst/>
@@ -5948,7 +6832,7 @@
           <a:lstStyle/>
           <a:p>
             <a:r>
-              <a:rPr sz="3000" b="1" i="0">
+              <a:rPr sz="2800" b="1" i="0">
                 <a:solidFill>
                   <a:srgbClr val="F2E9D6"/>
                 </a:solidFill>
@@ -5968,8 +6852,8 @@
         </p:nvSpPr>
         <p:spPr>
           <a:xfrm>
-            <a:off x="640080" y="2697480"/>
-            <a:ext cx="384048" cy="384048"/>
+            <a:off x="640080" y="2514600"/>
+            <a:ext cx="365760" cy="365760"/>
           </a:xfrm>
           <a:prstGeom prst="ellipse">
             <a:avLst/>
@@ -6002,7 +6886,7 @@
           <a:p>
             <a:pPr algn="ctr"/>
             <a:r>
-              <a:rPr sz="1500" b="1" i="0">
+              <a:rPr sz="1400" b="1" i="0">
                 <a:solidFill>
                   <a:srgbClr val="18110E"/>
                 </a:solidFill>
@@ -6022,8 +6906,8 @@
         </p:nvSpPr>
         <p:spPr>
           <a:xfrm>
-            <a:off x="1234440" y="2642616"/>
-            <a:ext cx="10241280" cy="822960"/>
+            <a:off x="1188720" y="2468880"/>
+            <a:ext cx="10332720" cy="914400"/>
           </a:xfrm>
           <a:prstGeom prst="rect">
             <a:avLst/>
@@ -6037,24 +6921,24 @@
           <a:lstStyle/>
           <a:p>
             <a:r>
-              <a:rPr sz="1600" b="1" i="0">
+              <a:rPr sz="1500" b="1" i="0">
                 <a:solidFill>
                   <a:srgbClr val="F2E9D6"/>
                 </a:solidFill>
                 <a:latin typeface="Microsoft YaHei"/>
                 <a:ea typeface="Microsoft YaHei"/>
               </a:rPr>
-              <a:t>进入「联系客服」页 或「设备看板」</a:t>
+              <a:t>进入「联系客服」或「设备看板」</a:t>
             </a:r>
           </a:p>
           <a:p>
             <a:pPr>
               <a:lnSpc>
-                <a:spcPct val="125000"/>
+                <a:spcPct val="120000"/>
               </a:lnSpc>
             </a:pPr>
             <a:r>
-              <a:rPr sz="1300" b="0" i="0">
+              <a:rPr sz="1200" b="0" i="0">
                 <a:solidFill>
                   <a:srgbClr val="C3B498"/>
                 </a:solidFill>
@@ -6074,8 +6958,8 @@
         </p:nvSpPr>
         <p:spPr>
           <a:xfrm>
-            <a:off x="640080" y="3566160"/>
-            <a:ext cx="384048" cy="384048"/>
+            <a:off x="640080" y="3355848"/>
+            <a:ext cx="365760" cy="365760"/>
           </a:xfrm>
           <a:prstGeom prst="ellipse">
             <a:avLst/>
@@ -6108,7 +6992,7 @@
           <a:p>
             <a:pPr algn="ctr"/>
             <a:r>
-              <a:rPr sz="1500" b="1" i="0">
+              <a:rPr sz="1400" b="1" i="0">
                 <a:solidFill>
                   <a:srgbClr val="18110E"/>
                 </a:solidFill>
@@ -6128,8 +7012,8 @@
         </p:nvSpPr>
         <p:spPr>
           <a:xfrm>
-            <a:off x="1234440" y="3511296"/>
-            <a:ext cx="10241280" cy="822960"/>
+            <a:off x="1188720" y="3310128"/>
+            <a:ext cx="10332720" cy="914400"/>
           </a:xfrm>
           <a:prstGeom prst="rect">
             <a:avLst/>
@@ -6143,31 +7027,31 @@
           <a:lstStyle/>
           <a:p>
             <a:r>
-              <a:rPr sz="1600" b="1" i="0">
+              <a:rPr sz="1500" b="1" i="0">
                 <a:solidFill>
                   <a:srgbClr val="F2E9D6"/>
                 </a:solidFill>
                 <a:latin typeface="Microsoft YaHei"/>
                 <a:ea typeface="Microsoft YaHei"/>
               </a:rPr>
-              <a:t>下载得到 zhusha-helper-extension.zip</a:t>
+              <a:t>下载得到 .zip 压缩包</a:t>
             </a:r>
           </a:p>
           <a:p>
             <a:pPr>
               <a:lnSpc>
-                <a:spcPct val="125000"/>
+                <a:spcPct val="120000"/>
               </a:lnSpc>
             </a:pPr>
             <a:r>
-              <a:rPr sz="1300" b="0" i="0">
+              <a:rPr sz="1200" b="0" i="0">
                 <a:solidFill>
                   <a:srgbClr val="C3B498"/>
                 </a:solidFill>
                 <a:latin typeface="Microsoft YaHei"/>
                 <a:ea typeface="Microsoft YaHei"/>
               </a:rPr>
-              <a:t>这是插件本体，需要解压后才能装。</a:t>
+              <a:t>文件名 zhusha-helper-extension.zip。</a:t>
             </a:r>
           </a:p>
         </p:txBody>
@@ -6180,8 +7064,8 @@
         </p:nvSpPr>
         <p:spPr>
           <a:xfrm>
-            <a:off x="640080" y="4434840"/>
-            <a:ext cx="384048" cy="384048"/>
+            <a:off x="640080" y="4197096"/>
+            <a:ext cx="365760" cy="365760"/>
           </a:xfrm>
           <a:prstGeom prst="ellipse">
             <a:avLst/>
@@ -6214,7 +7098,7 @@
           <a:p>
             <a:pPr algn="ctr"/>
             <a:r>
-              <a:rPr sz="1500" b="1" i="0">
+              <a:rPr sz="1400" b="1" i="0">
                 <a:solidFill>
                   <a:srgbClr val="18110E"/>
                 </a:solidFill>
@@ -6234,8 +7118,8 @@
         </p:nvSpPr>
         <p:spPr>
           <a:xfrm>
-            <a:off x="1234440" y="4379976"/>
-            <a:ext cx="10241280" cy="822960"/>
+            <a:off x="1188720" y="4151376"/>
+            <a:ext cx="10332720" cy="914400"/>
           </a:xfrm>
           <a:prstGeom prst="rect">
             <a:avLst/>
@@ -6249,7 +7133,7 @@
           <a:lstStyle/>
           <a:p>
             <a:r>
-              <a:rPr sz="1600" b="1" i="0">
+              <a:rPr sz="1500" b="1" i="0">
                 <a:solidFill>
                   <a:srgbClr val="F2E9D6"/>
                 </a:solidFill>
@@ -6262,18 +7146,18 @@
           <a:p>
             <a:pPr>
               <a:lnSpc>
-                <a:spcPct val="125000"/>
+                <a:spcPct val="120000"/>
               </a:lnSpc>
             </a:pPr>
             <a:r>
-              <a:rPr sz="1300" b="0" i="0">
+              <a:rPr sz="1200" b="0" i="0">
                 <a:solidFill>
                   <a:srgbClr val="C3B498"/>
                 </a:solidFill>
                 <a:latin typeface="Microsoft YaHei"/>
                 <a:ea typeface="Microsoft YaHei"/>
               </a:rPr>
-              <a:t>别放桌面/下载等临时目录——文件夹删了插件会失效。</a:t>
+              <a:t>别放桌面/下载等临时目录——删了插件会失效。</a:t>
             </a:r>
           </a:p>
         </p:txBody>
@@ -6286,8 +7170,8 @@
         </p:nvSpPr>
         <p:spPr>
           <a:xfrm>
-            <a:off x="566928" y="5806440"/>
-            <a:ext cx="11064240" cy="566928"/>
+            <a:off x="566928" y="5943600"/>
+            <a:ext cx="11064240" cy="548640"/>
           </a:xfrm>
           <a:prstGeom prst="rect">
             <a:avLst/>
@@ -6332,7 +7216,7 @@
         </p:nvSpPr>
         <p:spPr>
           <a:xfrm>
-            <a:off x="777240" y="5907024"/>
+            <a:off x="777240" y="6035040"/>
             <a:ext cx="10698480" cy="457200"/>
           </a:xfrm>
           <a:prstGeom prst="rect">
@@ -6357,14 +7241,50 @@
               <a:t>⚠ </a:t>
             </a:r>
             <a:r>
-              <a:rPr sz="1250" b="0" i="0">
+              <a:rPr sz="1200" b="0" i="0">
                 <a:solidFill>
                   <a:srgbClr val="F2E9D6"/>
                 </a:solidFill>
                 <a:latin typeface="Microsoft YaHei"/>
                 <a:ea typeface="Microsoft YaHei"/>
               </a:rPr>
-              <a:t>固定文件夹示例：D:\朱砂助手\ 或 文稿/朱砂助手/。解压后里面应有 manifest.json。</a:t>
+              <a:t>解压后文件夹里应能看到 manifest.json；建议放 D:\朱砂助手\ 或 文稿/朱砂助手/。</a:t>
+            </a:r>
+          </a:p>
+        </p:txBody>
+      </p:sp>
+      <p:sp>
+        <p:nvSpPr>
+          <p:cNvPr id="15" name="TextBox 14"/>
+          <p:cNvSpPr txBox="1"/>
+          <p:nvPr/>
+        </p:nvSpPr>
+        <p:spPr>
+          <a:xfrm>
+            <a:off x="10881360" y="6400800"/>
+            <a:ext cx="914400" cy="365760"/>
+          </a:xfrm>
+          <a:prstGeom prst="rect">
+            <a:avLst/>
+          </a:prstGeom>
+          <a:noFill/>
+        </p:spPr>
+        <p:txBody>
+          <a:bodyPr wrap="square" lIns="0" rIns="0" tIns="0" bIns="0">
+            <a:spAutoFit/>
+          </a:bodyPr>
+          <a:lstStyle/>
+          <a:p>
+            <a:pPr algn="r"/>
+            <a:r>
+              <a:rPr sz="1000" b="1" i="0">
+                <a:solidFill>
+                  <a:srgbClr val="C9A85F"/>
+                </a:solidFill>
+                <a:latin typeface="Times New Roman"/>
+                <a:ea typeface="Times New Roman"/>
+              </a:rPr>
+              <a:t>03</a:t>
             </a:r>
           </a:p>
         </p:txBody>
@@ -6439,8 +7359,8 @@
         </p:nvSpPr>
         <p:spPr>
           <a:xfrm>
-            <a:off x="566928" y="457200"/>
-            <a:ext cx="5486400" cy="457200"/>
+            <a:off x="566928" y="384048"/>
+            <a:ext cx="6400800" cy="457200"/>
           </a:xfrm>
           <a:prstGeom prst="rect">
             <a:avLst/>
@@ -6504,7 +7424,7 @@
         </p:nvCxnSpPr>
         <p:spPr>
           <a:xfrm>
-            <a:off x="566928" y="1051560"/>
+            <a:off x="566928" y="1024128"/>
             <a:ext cx="11064239" cy="0"/>
           </a:xfrm>
           <a:prstGeom prst="bentConnector3">
@@ -6539,8 +7459,8 @@
         </p:nvSpPr>
         <p:spPr>
           <a:xfrm>
-            <a:off x="566928" y="1234440"/>
-            <a:ext cx="10607040" cy="457200"/>
+            <a:off x="566928" y="1188720"/>
+            <a:ext cx="10607040" cy="365760"/>
           </a:xfrm>
           <a:prstGeom prst="rect">
             <a:avLst/>
@@ -6574,8 +7494,8 @@
         </p:nvSpPr>
         <p:spPr>
           <a:xfrm>
-            <a:off x="566928" y="1600200"/>
-            <a:ext cx="10607040" cy="822960"/>
+            <a:off x="566928" y="1536192"/>
+            <a:ext cx="10607040" cy="731520"/>
           </a:xfrm>
           <a:prstGeom prst="rect">
             <a:avLst/>
@@ -6589,7 +7509,7 @@
           <a:lstStyle/>
           <a:p>
             <a:r>
-              <a:rPr sz="3000" b="1" i="0">
+              <a:rPr sz="2800" b="1" i="0">
                 <a:solidFill>
                   <a:srgbClr val="F2E9D6"/>
                 </a:solidFill>
@@ -6609,8 +7529,8 @@
         </p:nvSpPr>
         <p:spPr>
           <a:xfrm>
-            <a:off x="640080" y="2697480"/>
-            <a:ext cx="384048" cy="384048"/>
+            <a:off x="640080" y="2514600"/>
+            <a:ext cx="365760" cy="365760"/>
           </a:xfrm>
           <a:prstGeom prst="ellipse">
             <a:avLst/>
@@ -6643,7 +7563,7 @@
           <a:p>
             <a:pPr algn="ctr"/>
             <a:r>
-              <a:rPr sz="1500" b="1" i="0">
+              <a:rPr sz="1400" b="1" i="0">
                 <a:solidFill>
                   <a:srgbClr val="18110E"/>
                 </a:solidFill>
@@ -6663,8 +7583,8 @@
         </p:nvSpPr>
         <p:spPr>
           <a:xfrm>
-            <a:off x="1234440" y="2642616"/>
-            <a:ext cx="10241280" cy="822960"/>
+            <a:off x="1188720" y="2468880"/>
+            <a:ext cx="5029200" cy="914400"/>
           </a:xfrm>
           <a:prstGeom prst="rect">
             <a:avLst/>
@@ -6678,7 +7598,7 @@
           <a:lstStyle/>
           <a:p>
             <a:r>
-              <a:rPr sz="1600" b="1" i="0">
+              <a:rPr sz="1500" b="1" i="0">
                 <a:solidFill>
                   <a:srgbClr val="F2E9D6"/>
                 </a:solidFill>
@@ -6691,11 +7611,11 @@
           <a:p>
             <a:pPr>
               <a:lnSpc>
-                <a:spcPct val="125000"/>
+                <a:spcPct val="120000"/>
               </a:lnSpc>
             </a:pPr>
             <a:r>
-              <a:rPr sz="1300" b="0" i="0">
+              <a:rPr sz="1200" b="0" i="0">
                 <a:solidFill>
                   <a:srgbClr val="C3B498"/>
                 </a:solidFill>
@@ -6715,8 +7635,8 @@
         </p:nvSpPr>
         <p:spPr>
           <a:xfrm>
-            <a:off x="640080" y="3566160"/>
-            <a:ext cx="384048" cy="384048"/>
+            <a:off x="640080" y="3355848"/>
+            <a:ext cx="365760" cy="365760"/>
           </a:xfrm>
           <a:prstGeom prst="ellipse">
             <a:avLst/>
@@ -6749,7 +7669,7 @@
           <a:p>
             <a:pPr algn="ctr"/>
             <a:r>
-              <a:rPr sz="1500" b="1" i="0">
+              <a:rPr sz="1400" b="1" i="0">
                 <a:solidFill>
                   <a:srgbClr val="18110E"/>
                 </a:solidFill>
@@ -6769,8 +7689,8 @@
         </p:nvSpPr>
         <p:spPr>
           <a:xfrm>
-            <a:off x="1234440" y="3511296"/>
-            <a:ext cx="10241280" cy="822960"/>
+            <a:off x="1188720" y="3310128"/>
+            <a:ext cx="5029200" cy="914400"/>
           </a:xfrm>
           <a:prstGeom prst="rect">
             <a:avLst/>
@@ -6784,31 +7704,243 @@
           <a:lstStyle/>
           <a:p>
             <a:r>
-              <a:rPr sz="1600" b="1" i="0">
+              <a:rPr sz="1500" b="1" i="0">
                 <a:solidFill>
                   <a:srgbClr val="F2E9D6"/>
                 </a:solidFill>
                 <a:latin typeface="Microsoft YaHei"/>
                 <a:ea typeface="Microsoft YaHei"/>
               </a:rPr>
-              <a:t>也可从菜单进入</a:t>
+              <a:t>或从菜单进入</a:t>
             </a:r>
           </a:p>
           <a:p>
             <a:pPr>
               <a:lnSpc>
-                <a:spcPct val="125000"/>
+                <a:spcPct val="120000"/>
               </a:lnSpc>
             </a:pPr>
             <a:r>
-              <a:rPr sz="1300" b="0" i="0">
+              <a:rPr sz="1200" b="0" i="0">
                 <a:solidFill>
                   <a:srgbClr val="C3B498"/>
                 </a:solidFill>
                 <a:latin typeface="Microsoft YaHei"/>
                 <a:ea typeface="Microsoft YaHei"/>
               </a:rPr>
-              <a:t>浏览器右上角 ⋮ →「扩展」→「管理扩展程序」。</a:t>
+              <a:t>右上角 ⋮ →「扩展」→「管理扩展程序」。</a:t>
+            </a:r>
+          </a:p>
+        </p:txBody>
+      </p:sp>
+      <p:sp>
+        <p:nvSpPr>
+          <p:cNvPr id="11" name="Oval 10"/>
+          <p:cNvSpPr/>
+          <p:nvPr/>
+        </p:nvSpPr>
+        <p:spPr>
+          <a:xfrm>
+            <a:off x="640080" y="4197096"/>
+            <a:ext cx="365760" cy="365760"/>
+          </a:xfrm>
+          <a:prstGeom prst="ellipse">
+            <a:avLst/>
+          </a:prstGeom>
+          <a:solidFill>
+            <a:srgbClr val="C9A85F"/>
+          </a:solidFill>
+          <a:ln>
+            <a:noFill/>
+          </a:ln>
+          <a:effectLst/>
+        </p:spPr>
+        <p:style>
+          <a:lnRef idx="1">
+            <a:schemeClr val="accent1"/>
+          </a:lnRef>
+          <a:fillRef idx="3">
+            <a:schemeClr val="accent1"/>
+          </a:fillRef>
+          <a:effectRef idx="2">
+            <a:schemeClr val="accent1"/>
+          </a:effectRef>
+          <a:fontRef idx="minor">
+            <a:schemeClr val="lt1"/>
+          </a:fontRef>
+        </p:style>
+        <p:txBody>
+          <a:bodyPr rtlCol="0" anchor="ctr" tIns="0" bIns="0"/>
+          <a:lstStyle/>
+          <a:p>
+            <a:pPr algn="ctr"/>
+            <a:r>
+              <a:rPr sz="1400" b="1" i="0">
+                <a:solidFill>
+                  <a:srgbClr val="18110E"/>
+                </a:solidFill>
+                <a:latin typeface="Times New Roman"/>
+                <a:ea typeface="Times New Roman"/>
+              </a:rPr>
+              <a:t>3</a:t>
+            </a:r>
+          </a:p>
+        </p:txBody>
+      </p:sp>
+      <p:sp>
+        <p:nvSpPr>
+          <p:cNvPr id="12" name="TextBox 11"/>
+          <p:cNvSpPr txBox="1"/>
+          <p:nvPr/>
+        </p:nvSpPr>
+        <p:spPr>
+          <a:xfrm>
+            <a:off x="1188720" y="4151376"/>
+            <a:ext cx="5029200" cy="914400"/>
+          </a:xfrm>
+          <a:prstGeom prst="rect">
+            <a:avLst/>
+          </a:prstGeom>
+          <a:noFill/>
+        </p:spPr>
+        <p:txBody>
+          <a:bodyPr wrap="square" lIns="0" rIns="0" tIns="0" bIns="0">
+            <a:spAutoFit/>
+          </a:bodyPr>
+          <a:lstStyle/>
+          <a:p>
+            <a:r>
+              <a:rPr sz="1500" b="1" i="0">
+                <a:solidFill>
+                  <a:srgbClr val="F2E9D6"/>
+                </a:solidFill>
+                <a:latin typeface="Microsoft YaHei"/>
+                <a:ea typeface="Microsoft YaHei"/>
+              </a:rPr>
+              <a:t>看到扩展程序列表页</a:t>
+            </a:r>
+          </a:p>
+          <a:p>
+            <a:pPr>
+              <a:lnSpc>
+                <a:spcPct val="120000"/>
+              </a:lnSpc>
+            </a:pPr>
+            <a:r>
+              <a:rPr sz="1200" b="0" i="0">
+                <a:solidFill>
+                  <a:srgbClr val="C3B498"/>
+                </a:solidFill>
+                <a:latin typeface="Microsoft YaHei"/>
+                <a:ea typeface="Microsoft YaHei"/>
+              </a:rPr>
+              <a:t>即右图这个页面。</a:t>
+            </a:r>
+          </a:p>
+        </p:txBody>
+      </p:sp>
+      <p:sp>
+        <p:nvSpPr>
+          <p:cNvPr id="13" name="Rectangle 12"/>
+          <p:cNvSpPr/>
+          <p:nvPr/>
+        </p:nvSpPr>
+        <p:spPr>
+          <a:xfrm>
+            <a:off x="6391656" y="2726574"/>
+            <a:ext cx="5321808" cy="3142210"/>
+          </a:xfrm>
+          <a:prstGeom prst="rect">
+            <a:avLst/>
+          </a:prstGeom>
+          <a:solidFill>
+            <a:srgbClr val="241B16"/>
+          </a:solidFill>
+          <a:ln w="12700">
+            <a:solidFill>
+              <a:srgbClr val="C9A85F"/>
+            </a:solidFill>
+          </a:ln>
+          <a:effectLst/>
+        </p:spPr>
+        <p:style>
+          <a:lnRef idx="1">
+            <a:schemeClr val="accent1"/>
+          </a:lnRef>
+          <a:fillRef idx="3">
+            <a:schemeClr val="accent1"/>
+          </a:fillRef>
+          <a:effectRef idx="2">
+            <a:schemeClr val="accent1"/>
+          </a:effectRef>
+          <a:fontRef idx="minor">
+            <a:schemeClr val="lt1"/>
+          </a:fontRef>
+        </p:style>
+        <p:txBody>
+          <a:bodyPr rtlCol="0" anchor="ctr"/>
+          <a:lstStyle/>
+          <a:p>
+            <a:pPr algn="ctr"/>
+          </a:p>
+        </p:txBody>
+      </p:sp>
+      <p:pic>
+        <p:nvPicPr>
+          <p:cNvPr id="14" name="Picture 13" descr="m_ext.png"/>
+          <p:cNvPicPr>
+            <a:picLocks noChangeAspect="1"/>
+          </p:cNvPicPr>
+          <p:nvPr/>
+        </p:nvPicPr>
+        <p:blipFill>
+          <a:blip r:embed="rId2"/>
+          <a:stretch>
+            <a:fillRect/>
+          </a:stretch>
+        </p:blipFill>
+        <p:spPr>
+          <a:xfrm>
+            <a:off x="6446520" y="2781438"/>
+            <a:ext cx="5212080" cy="3032482"/>
+          </a:xfrm>
+          <a:prstGeom prst="rect">
+            <a:avLst/>
+          </a:prstGeom>
+        </p:spPr>
+      </p:pic>
+      <p:sp>
+        <p:nvSpPr>
+          <p:cNvPr id="15" name="TextBox 14"/>
+          <p:cNvSpPr txBox="1"/>
+          <p:nvPr/>
+        </p:nvSpPr>
+        <p:spPr>
+          <a:xfrm>
+            <a:off x="10881360" y="6400800"/>
+            <a:ext cx="914400" cy="365760"/>
+          </a:xfrm>
+          <a:prstGeom prst="rect">
+            <a:avLst/>
+          </a:prstGeom>
+          <a:noFill/>
+        </p:spPr>
+        <p:txBody>
+          <a:bodyPr wrap="square" lIns="0" rIns="0" tIns="0" bIns="0">
+            <a:spAutoFit/>
+          </a:bodyPr>
+          <a:lstStyle/>
+          <a:p>
+            <a:pPr algn="r"/>
+            <a:r>
+              <a:rPr sz="1000" b="1" i="0">
+                <a:solidFill>
+                  <a:srgbClr val="C9A85F"/>
+                </a:solidFill>
+                <a:latin typeface="Times New Roman"/>
+                <a:ea typeface="Times New Roman"/>
+              </a:rPr>
+              <a:t>04</a:t>
             </a:r>
           </a:p>
         </p:txBody>
@@ -6883,8 +8015,8 @@
         </p:nvSpPr>
         <p:spPr>
           <a:xfrm>
-            <a:off x="566928" y="457200"/>
-            <a:ext cx="5486400" cy="457200"/>
+            <a:off x="566928" y="384048"/>
+            <a:ext cx="6400800" cy="457200"/>
           </a:xfrm>
           <a:prstGeom prst="rect">
             <a:avLst/>
@@ -6948,7 +8080,7 @@
         </p:nvCxnSpPr>
         <p:spPr>
           <a:xfrm>
-            <a:off x="566928" y="1051560"/>
+            <a:off x="566928" y="1024128"/>
             <a:ext cx="11064239" cy="0"/>
           </a:xfrm>
           <a:prstGeom prst="bentConnector3">
@@ -6983,8 +8115,8 @@
         </p:nvSpPr>
         <p:spPr>
           <a:xfrm>
-            <a:off x="566928" y="1234440"/>
-            <a:ext cx="10607040" cy="457200"/>
+            <a:off x="566928" y="1188720"/>
+            <a:ext cx="10607040" cy="365760"/>
           </a:xfrm>
           <a:prstGeom prst="rect">
             <a:avLst/>
@@ -7018,8 +8150,8 @@
         </p:nvSpPr>
         <p:spPr>
           <a:xfrm>
-            <a:off x="566928" y="1600200"/>
-            <a:ext cx="10607040" cy="822960"/>
+            <a:off x="566928" y="1536192"/>
+            <a:ext cx="10607040" cy="731520"/>
           </a:xfrm>
           <a:prstGeom prst="rect">
             <a:avLst/>
@@ -7033,7 +8165,7 @@
           <a:lstStyle/>
           <a:p>
             <a:r>
-              <a:rPr sz="3000" b="1" i="0">
+              <a:rPr sz="2800" b="1" i="0">
                 <a:solidFill>
                   <a:srgbClr val="F2E9D6"/>
                 </a:solidFill>
@@ -7053,8 +8185,8 @@
         </p:nvSpPr>
         <p:spPr>
           <a:xfrm>
-            <a:off x="640080" y="2697480"/>
-            <a:ext cx="384048" cy="384048"/>
+            <a:off x="640080" y="2514600"/>
+            <a:ext cx="365760" cy="365760"/>
           </a:xfrm>
           <a:prstGeom prst="ellipse">
             <a:avLst/>
@@ -7087,7 +8219,7 @@
           <a:p>
             <a:pPr algn="ctr"/>
             <a:r>
-              <a:rPr sz="1500" b="1" i="0">
+              <a:rPr sz="1400" b="1" i="0">
                 <a:solidFill>
                   <a:srgbClr val="18110E"/>
                 </a:solidFill>
@@ -7107,8 +8239,8 @@
         </p:nvSpPr>
         <p:spPr>
           <a:xfrm>
-            <a:off x="1234440" y="2642616"/>
-            <a:ext cx="10241280" cy="822960"/>
+            <a:off x="1188720" y="2468880"/>
+            <a:ext cx="5029200" cy="914400"/>
           </a:xfrm>
           <a:prstGeom prst="rect">
             <a:avLst/>
@@ -7122,7 +8254,7 @@
           <a:lstStyle/>
           <a:p>
             <a:r>
-              <a:rPr sz="1600" b="1" i="0">
+              <a:rPr sz="1500" b="1" i="0">
                 <a:solidFill>
                   <a:srgbClr val="F2E9D6"/>
                 </a:solidFill>
@@ -7135,18 +8267,18 @@
           <a:p>
             <a:pPr>
               <a:lnSpc>
-                <a:spcPct val="125000"/>
+                <a:spcPct val="120000"/>
               </a:lnSpc>
             </a:pPr>
             <a:r>
-              <a:rPr sz="1300" b="0" i="0">
+              <a:rPr sz="1200" b="0" i="0">
                 <a:solidFill>
                   <a:srgbClr val="C3B498"/>
                 </a:solidFill>
                 <a:latin typeface="Microsoft YaHei"/>
                 <a:ea typeface="Microsoft YaHei"/>
               </a:rPr>
-              <a:t>把它打开（变蓝）。</a:t>
+              <a:t>把它打开（变蓝，见右图右上角）。</a:t>
             </a:r>
           </a:p>
         </p:txBody>
@@ -7159,8 +8291,8 @@
         </p:nvSpPr>
         <p:spPr>
           <a:xfrm>
-            <a:off x="640080" y="3566160"/>
-            <a:ext cx="384048" cy="384048"/>
+            <a:off x="640080" y="3355848"/>
+            <a:ext cx="365760" cy="365760"/>
           </a:xfrm>
           <a:prstGeom prst="ellipse">
             <a:avLst/>
@@ -7193,7 +8325,7 @@
           <a:p>
             <a:pPr algn="ctr"/>
             <a:r>
-              <a:rPr sz="1500" b="1" i="0">
+              <a:rPr sz="1400" b="1" i="0">
                 <a:solidFill>
                   <a:srgbClr val="18110E"/>
                 </a:solidFill>
@@ -7213,8 +8345,8 @@
         </p:nvSpPr>
         <p:spPr>
           <a:xfrm>
-            <a:off x="1234440" y="3511296"/>
-            <a:ext cx="10241280" cy="822960"/>
+            <a:off x="1188720" y="3310128"/>
+            <a:ext cx="5029200" cy="914400"/>
           </a:xfrm>
           <a:prstGeom prst="rect">
             <a:avLst/>
@@ -7228,31 +8360,228 @@
           <a:lstStyle/>
           <a:p>
             <a:r>
-              <a:rPr sz="1600" b="1" i="0">
+              <a:rPr sz="1500" b="1" i="0">
                 <a:solidFill>
                   <a:srgbClr val="F2E9D6"/>
                 </a:solidFill>
                 <a:latin typeface="Microsoft YaHei"/>
                 <a:ea typeface="Microsoft YaHei"/>
               </a:rPr>
-              <a:t>页面会多出三个按钮</a:t>
+              <a:t>页面顶部会多出按钮</a:t>
             </a:r>
           </a:p>
           <a:p>
             <a:pPr>
               <a:lnSpc>
-                <a:spcPct val="125000"/>
+                <a:spcPct val="120000"/>
               </a:lnSpc>
             </a:pPr>
             <a:r>
-              <a:rPr sz="1300" b="0" i="0">
+              <a:rPr sz="1200" b="0" i="0">
                 <a:solidFill>
                   <a:srgbClr val="C3B498"/>
                 </a:solidFill>
                 <a:latin typeface="Microsoft YaHei"/>
                 <a:ea typeface="Microsoft YaHei"/>
               </a:rPr>
-              <a:t>出现「加载已解压的扩展程序」等按钮，说明已开启。</a:t>
+              <a:t>出现「加载已解压的扩展程序」等三个按钮。</a:t>
+            </a:r>
+          </a:p>
+        </p:txBody>
+      </p:sp>
+      <p:sp>
+        <p:nvSpPr>
+          <p:cNvPr id="11" name="Rectangle 10"/>
+          <p:cNvSpPr/>
+          <p:nvPr/>
+        </p:nvSpPr>
+        <p:spPr>
+          <a:xfrm>
+            <a:off x="6391656" y="2726574"/>
+            <a:ext cx="5321808" cy="3142210"/>
+          </a:xfrm>
+          <a:prstGeom prst="rect">
+            <a:avLst/>
+          </a:prstGeom>
+          <a:solidFill>
+            <a:srgbClr val="241B16"/>
+          </a:solidFill>
+          <a:ln w="12700">
+            <a:solidFill>
+              <a:srgbClr val="C9A85F"/>
+            </a:solidFill>
+          </a:ln>
+          <a:effectLst/>
+        </p:spPr>
+        <p:style>
+          <a:lnRef idx="1">
+            <a:schemeClr val="accent1"/>
+          </a:lnRef>
+          <a:fillRef idx="3">
+            <a:schemeClr val="accent1"/>
+          </a:fillRef>
+          <a:effectRef idx="2">
+            <a:schemeClr val="accent1"/>
+          </a:effectRef>
+          <a:fontRef idx="minor">
+            <a:schemeClr val="lt1"/>
+          </a:fontRef>
+        </p:style>
+        <p:txBody>
+          <a:bodyPr rtlCol="0" anchor="ctr"/>
+          <a:lstStyle/>
+          <a:p>
+            <a:pPr algn="ctr"/>
+          </a:p>
+        </p:txBody>
+      </p:sp>
+      <p:pic>
+        <p:nvPicPr>
+          <p:cNvPr id="12" name="Picture 11" descr="m_ext.png"/>
+          <p:cNvPicPr>
+            <a:picLocks noChangeAspect="1"/>
+          </p:cNvPicPr>
+          <p:nvPr/>
+        </p:nvPicPr>
+        <p:blipFill>
+          <a:blip r:embed="rId2"/>
+          <a:stretch>
+            <a:fillRect/>
+          </a:stretch>
+        </p:blipFill>
+        <p:spPr>
+          <a:xfrm>
+            <a:off x="6446520" y="2781438"/>
+            <a:ext cx="5212080" cy="3032482"/>
+          </a:xfrm>
+          <a:prstGeom prst="rect">
+            <a:avLst/>
+          </a:prstGeom>
+        </p:spPr>
+      </p:pic>
+      <p:sp>
+        <p:nvSpPr>
+          <p:cNvPr id="13" name="Rectangle 12"/>
+          <p:cNvSpPr/>
+          <p:nvPr/>
+        </p:nvSpPr>
+        <p:spPr>
+          <a:xfrm>
+            <a:off x="566928" y="5943600"/>
+            <a:ext cx="11064240" cy="548640"/>
+          </a:xfrm>
+          <a:prstGeom prst="rect">
+            <a:avLst/>
+          </a:prstGeom>
+          <a:solidFill>
+            <a:srgbClr val="241B16"/>
+          </a:solidFill>
+          <a:ln w="12700">
+            <a:solidFill>
+              <a:srgbClr val="C9A85F"/>
+            </a:solidFill>
+          </a:ln>
+          <a:effectLst/>
+        </p:spPr>
+        <p:style>
+          <a:lnRef idx="1">
+            <a:schemeClr val="accent1"/>
+          </a:lnRef>
+          <a:fillRef idx="3">
+            <a:schemeClr val="accent1"/>
+          </a:fillRef>
+          <a:effectRef idx="2">
+            <a:schemeClr val="accent1"/>
+          </a:effectRef>
+          <a:fontRef idx="minor">
+            <a:schemeClr val="lt1"/>
+          </a:fontRef>
+        </p:style>
+        <p:txBody>
+          <a:bodyPr rtlCol="0" anchor="ctr"/>
+          <a:lstStyle/>
+          <a:p>
+            <a:pPr algn="ctr"/>
+          </a:p>
+        </p:txBody>
+      </p:sp>
+      <p:sp>
+        <p:nvSpPr>
+          <p:cNvPr id="14" name="TextBox 13"/>
+          <p:cNvSpPr txBox="1"/>
+          <p:nvPr/>
+        </p:nvSpPr>
+        <p:spPr>
+          <a:xfrm>
+            <a:off x="777240" y="6035040"/>
+            <a:ext cx="10698480" cy="457200"/>
+          </a:xfrm>
+          <a:prstGeom prst="rect">
+            <a:avLst/>
+          </a:prstGeom>
+          <a:noFill/>
+        </p:spPr>
+        <p:txBody>
+          <a:bodyPr wrap="square" lIns="0" rIns="0" tIns="0" bIns="0">
+            <a:spAutoFit/>
+          </a:bodyPr>
+          <a:lstStyle/>
+          <a:p>
+            <a:r>
+              <a:rPr sz="1300" b="1" i="0">
+                <a:solidFill>
+                  <a:srgbClr val="C9A85F"/>
+                </a:solidFill>
+                <a:latin typeface="Microsoft YaHei"/>
+                <a:ea typeface="Microsoft YaHei"/>
+              </a:rPr>
+              <a:t>⚠ </a:t>
+            </a:r>
+            <a:r>
+              <a:rPr sz="1200" b="0" i="0">
+                <a:solidFill>
+                  <a:srgbClr val="F2E9D6"/>
+                </a:solidFill>
+                <a:latin typeface="Microsoft YaHei"/>
+                <a:ea typeface="Microsoft YaHei"/>
+              </a:rPr>
+              <a:t>没有这三个按钮，就是「开发者模式」还没打开——务必先打开它。</a:t>
+            </a:r>
+          </a:p>
+        </p:txBody>
+      </p:sp>
+      <p:sp>
+        <p:nvSpPr>
+          <p:cNvPr id="15" name="TextBox 14"/>
+          <p:cNvSpPr txBox="1"/>
+          <p:nvPr/>
+        </p:nvSpPr>
+        <p:spPr>
+          <a:xfrm>
+            <a:off x="10881360" y="6400800"/>
+            <a:ext cx="914400" cy="365760"/>
+          </a:xfrm>
+          <a:prstGeom prst="rect">
+            <a:avLst/>
+          </a:prstGeom>
+          <a:noFill/>
+        </p:spPr>
+        <p:txBody>
+          <a:bodyPr wrap="square" lIns="0" rIns="0" tIns="0" bIns="0">
+            <a:spAutoFit/>
+          </a:bodyPr>
+          <a:lstStyle/>
+          <a:p>
+            <a:pPr algn="r"/>
+            <a:r>
+              <a:rPr sz="1000" b="1" i="0">
+                <a:solidFill>
+                  <a:srgbClr val="C9A85F"/>
+                </a:solidFill>
+                <a:latin typeface="Times New Roman"/>
+                <a:ea typeface="Times New Roman"/>
+              </a:rPr>
+              <a:t>05</a:t>
             </a:r>
           </a:p>
         </p:txBody>
@@ -7327,8 +8656,8 @@
         </p:nvSpPr>
         <p:spPr>
           <a:xfrm>
-            <a:off x="566928" y="457200"/>
-            <a:ext cx="5486400" cy="457200"/>
+            <a:off x="566928" y="384048"/>
+            <a:ext cx="6400800" cy="457200"/>
           </a:xfrm>
           <a:prstGeom prst="rect">
             <a:avLst/>
@@ -7392,7 +8721,7 @@
         </p:nvCxnSpPr>
         <p:spPr>
           <a:xfrm>
-            <a:off x="566928" y="1051560"/>
+            <a:off x="566928" y="1024128"/>
             <a:ext cx="11064239" cy="0"/>
           </a:xfrm>
           <a:prstGeom prst="bentConnector3">
@@ -7427,8 +8756,8 @@
         </p:nvSpPr>
         <p:spPr>
           <a:xfrm>
-            <a:off x="566928" y="1234440"/>
-            <a:ext cx="10607040" cy="457200"/>
+            <a:off x="566928" y="1188720"/>
+            <a:ext cx="10607040" cy="365760"/>
           </a:xfrm>
           <a:prstGeom prst="rect">
             <a:avLst/>
@@ -7462,8 +8791,8 @@
         </p:nvSpPr>
         <p:spPr>
           <a:xfrm>
-            <a:off x="566928" y="1600200"/>
-            <a:ext cx="10607040" cy="822960"/>
+            <a:off x="566928" y="1536192"/>
+            <a:ext cx="10607040" cy="731520"/>
           </a:xfrm>
           <a:prstGeom prst="rect">
             <a:avLst/>
@@ -7477,7 +8806,7 @@
           <a:lstStyle/>
           <a:p>
             <a:r>
-              <a:rPr sz="3000" b="1" i="0">
+              <a:rPr sz="2800" b="1" i="0">
                 <a:solidFill>
                   <a:srgbClr val="F2E9D6"/>
                 </a:solidFill>
@@ -7497,8 +8826,8 @@
         </p:nvSpPr>
         <p:spPr>
           <a:xfrm>
-            <a:off x="640080" y="2697480"/>
-            <a:ext cx="384048" cy="384048"/>
+            <a:off x="640080" y="2514600"/>
+            <a:ext cx="365760" cy="365760"/>
           </a:xfrm>
           <a:prstGeom prst="ellipse">
             <a:avLst/>
@@ -7531,7 +8860,7 @@
           <a:p>
             <a:pPr algn="ctr"/>
             <a:r>
-              <a:rPr sz="1500" b="1" i="0">
+              <a:rPr sz="1400" b="1" i="0">
                 <a:solidFill>
                   <a:srgbClr val="18110E"/>
                 </a:solidFill>
@@ -7551,8 +8880,8 @@
         </p:nvSpPr>
         <p:spPr>
           <a:xfrm>
-            <a:off x="1234440" y="2642616"/>
-            <a:ext cx="10241280" cy="822960"/>
+            <a:off x="1188720" y="2468880"/>
+            <a:ext cx="5029200" cy="914400"/>
           </a:xfrm>
           <a:prstGeom prst="rect">
             <a:avLst/>
@@ -7566,7 +8895,7 @@
           <a:lstStyle/>
           <a:p>
             <a:r>
-              <a:rPr sz="1600" b="1" i="0">
+              <a:rPr sz="1500" b="1" i="0">
                 <a:solidFill>
                   <a:srgbClr val="F2E9D6"/>
                 </a:solidFill>
@@ -7579,18 +8908,18 @@
           <a:p>
             <a:pPr>
               <a:lnSpc>
-                <a:spcPct val="125000"/>
+                <a:spcPct val="120000"/>
               </a:lnSpc>
             </a:pPr>
             <a:r>
-              <a:rPr sz="1300" b="0" i="0">
+              <a:rPr sz="1200" b="0" i="0">
                 <a:solidFill>
                   <a:srgbClr val="C3B498"/>
                 </a:solidFill>
                 <a:latin typeface="Microsoft YaHei"/>
                 <a:ea typeface="Microsoft YaHei"/>
               </a:rPr>
-              <a:t>Load unpacked。</a:t>
+              <a:t>英文界面是 Load unpacked。</a:t>
             </a:r>
           </a:p>
         </p:txBody>
@@ -7603,8 +8932,8 @@
         </p:nvSpPr>
         <p:spPr>
           <a:xfrm>
-            <a:off x="640080" y="3566160"/>
-            <a:ext cx="384048" cy="384048"/>
+            <a:off x="640080" y="3355848"/>
+            <a:ext cx="365760" cy="365760"/>
           </a:xfrm>
           <a:prstGeom prst="ellipse">
             <a:avLst/>
@@ -7637,7 +8966,7 @@
           <a:p>
             <a:pPr algn="ctr"/>
             <a:r>
-              <a:rPr sz="1500" b="1" i="0">
+              <a:rPr sz="1400" b="1" i="0">
                 <a:solidFill>
                   <a:srgbClr val="18110E"/>
                 </a:solidFill>
@@ -7657,8 +8986,8 @@
         </p:nvSpPr>
         <p:spPr>
           <a:xfrm>
-            <a:off x="1234440" y="3511296"/>
-            <a:ext cx="10241280" cy="822960"/>
+            <a:off x="1188720" y="3310128"/>
+            <a:ext cx="5029200" cy="914400"/>
           </a:xfrm>
           <a:prstGeom prst="rect">
             <a:avLst/>
@@ -7672,31 +9001,31 @@
           <a:lstStyle/>
           <a:p>
             <a:r>
-              <a:rPr sz="1600" b="1" i="0">
+              <a:rPr sz="1500" b="1" i="0">
                 <a:solidFill>
                   <a:srgbClr val="F2E9D6"/>
                 </a:solidFill>
                 <a:latin typeface="Microsoft YaHei"/>
                 <a:ea typeface="Microsoft YaHei"/>
               </a:rPr>
-              <a:t>选中第 1 步解压出来的文件夹</a:t>
+              <a:t>选中第 1 步解压出的文件夹</a:t>
             </a:r>
           </a:p>
           <a:p>
             <a:pPr>
               <a:lnSpc>
-                <a:spcPct val="125000"/>
+                <a:spcPct val="120000"/>
               </a:lnSpc>
             </a:pPr>
             <a:r>
-              <a:rPr sz="1300" b="0" i="0">
+              <a:rPr sz="1200" b="0" i="0">
                 <a:solidFill>
                   <a:srgbClr val="C3B498"/>
                 </a:solidFill>
                 <a:latin typeface="Microsoft YaHei"/>
                 <a:ea typeface="Microsoft YaHei"/>
               </a:rPr>
-              <a:t>注意是选文件夹本身，不是里面的文件。</a:t>
+              <a:t>注意选文件夹本身（右图蓝色项），不是里面的文件。</a:t>
             </a:r>
           </a:p>
         </p:txBody>
@@ -7709,8 +9038,8 @@
         </p:nvSpPr>
         <p:spPr>
           <a:xfrm>
-            <a:off x="640080" y="4434840"/>
-            <a:ext cx="384048" cy="384048"/>
+            <a:off x="640080" y="4197096"/>
+            <a:ext cx="365760" cy="365760"/>
           </a:xfrm>
           <a:prstGeom prst="ellipse">
             <a:avLst/>
@@ -7743,7 +9072,7 @@
           <a:p>
             <a:pPr algn="ctr"/>
             <a:r>
-              <a:rPr sz="1500" b="1" i="0">
+              <a:rPr sz="1400" b="1" i="0">
                 <a:solidFill>
                   <a:srgbClr val="18110E"/>
                 </a:solidFill>
@@ -7763,8 +9092,8 @@
         </p:nvSpPr>
         <p:spPr>
           <a:xfrm>
-            <a:off x="1234440" y="4379976"/>
-            <a:ext cx="10241280" cy="822960"/>
+            <a:off x="1188720" y="4151376"/>
+            <a:ext cx="5029200" cy="914400"/>
           </a:xfrm>
           <a:prstGeom prst="rect">
             <a:avLst/>
@@ -7778,31 +9107,31 @@
           <a:lstStyle/>
           <a:p>
             <a:r>
-              <a:rPr sz="1600" b="1" i="0">
+              <a:rPr sz="1500" b="1" i="0">
                 <a:solidFill>
                   <a:srgbClr val="F2E9D6"/>
                 </a:solidFill>
                 <a:latin typeface="Microsoft YaHei"/>
                 <a:ea typeface="Microsoft YaHei"/>
               </a:rPr>
-              <a:t>列表出现「朱砂助手」即安装成功</a:t>
+              <a:t>列表出现「朱砂助手」即成功</a:t>
             </a:r>
           </a:p>
           <a:p>
             <a:pPr>
               <a:lnSpc>
-                <a:spcPct val="125000"/>
+                <a:spcPct val="120000"/>
               </a:lnSpc>
             </a:pPr>
             <a:r>
-              <a:rPr sz="1300" b="0" i="0">
+              <a:rPr sz="1200" b="0" i="0">
                 <a:solidFill>
                   <a:srgbClr val="C3B498"/>
                 </a:solidFill>
                 <a:latin typeface="Microsoft YaHei"/>
                 <a:ea typeface="Microsoft YaHei"/>
               </a:rPr>
-              <a:t>能看到图标与版本号。</a:t>
+              <a:t>能看到图标与版本号 0.9.9。</a:t>
             </a:r>
           </a:p>
         </p:txBody>
@@ -7815,8 +9144,8 @@
         </p:nvSpPr>
         <p:spPr>
           <a:xfrm>
-            <a:off x="566928" y="5806440"/>
-            <a:ext cx="11064240" cy="566928"/>
+            <a:off x="6391656" y="2621280"/>
+            <a:ext cx="5321808" cy="3352800"/>
           </a:xfrm>
           <a:prstGeom prst="rect">
             <a:avLst/>
@@ -7853,15 +9182,85 @@
           </a:p>
         </p:txBody>
       </p:sp>
-      <p:sp>
-        <p:nvSpPr>
-          <p:cNvPr id="14" name="TextBox 13"/>
+      <p:pic>
+        <p:nvPicPr>
+          <p:cNvPr id="14" name="Picture 13" descr="m_load.png"/>
+          <p:cNvPicPr>
+            <a:picLocks noChangeAspect="1"/>
+          </p:cNvPicPr>
+          <p:nvPr/>
+        </p:nvPicPr>
+        <p:blipFill>
+          <a:blip r:embed="rId2"/>
+          <a:stretch>
+            <a:fillRect/>
+          </a:stretch>
+        </p:blipFill>
+        <p:spPr>
+          <a:xfrm>
+            <a:off x="6446520" y="2676144"/>
+            <a:ext cx="5212080" cy="3243072"/>
+          </a:xfrm>
+          <a:prstGeom prst="rect">
+            <a:avLst/>
+          </a:prstGeom>
+        </p:spPr>
+      </p:pic>
+      <p:sp>
+        <p:nvSpPr>
+          <p:cNvPr id="15" name="Rectangle 14"/>
+          <p:cNvSpPr/>
+          <p:nvPr/>
+        </p:nvSpPr>
+        <p:spPr>
+          <a:xfrm>
+            <a:off x="566928" y="5943600"/>
+            <a:ext cx="11064240" cy="548640"/>
+          </a:xfrm>
+          <a:prstGeom prst="rect">
+            <a:avLst/>
+          </a:prstGeom>
+          <a:solidFill>
+            <a:srgbClr val="241B16"/>
+          </a:solidFill>
+          <a:ln w="12700">
+            <a:solidFill>
+              <a:srgbClr val="C9A85F"/>
+            </a:solidFill>
+          </a:ln>
+          <a:effectLst/>
+        </p:spPr>
+        <p:style>
+          <a:lnRef idx="1">
+            <a:schemeClr val="accent1"/>
+          </a:lnRef>
+          <a:fillRef idx="3">
+            <a:schemeClr val="accent1"/>
+          </a:fillRef>
+          <a:effectRef idx="2">
+            <a:schemeClr val="accent1"/>
+          </a:effectRef>
+          <a:fontRef idx="minor">
+            <a:schemeClr val="lt1"/>
+          </a:fontRef>
+        </p:style>
+        <p:txBody>
+          <a:bodyPr rtlCol="0" anchor="ctr"/>
+          <a:lstStyle/>
+          <a:p>
+            <a:pPr algn="ctr"/>
+          </a:p>
+        </p:txBody>
+      </p:sp>
+      <p:sp>
+        <p:nvSpPr>
+          <p:cNvPr id="16" name="TextBox 15"/>
           <p:cNvSpPr txBox="1"/>
           <p:nvPr/>
         </p:nvSpPr>
         <p:spPr>
           <a:xfrm>
-            <a:off x="777240" y="5907024"/>
+            <a:off x="777240" y="6035040"/>
             <a:ext cx="10698480" cy="457200"/>
           </a:xfrm>
           <a:prstGeom prst="rect">
@@ -7886,14 +9285,50 @@
               <a:t>⚠ </a:t>
             </a:r>
             <a:r>
-              <a:rPr sz="1250" b="0" i="0">
+              <a:rPr sz="1200" b="0" i="0">
                 <a:solidFill>
                   <a:srgbClr val="F2E9D6"/>
                 </a:solidFill>
                 <a:latin typeface="Microsoft YaHei"/>
                 <a:ea typeface="Microsoft YaHei"/>
               </a:rPr>
-              <a:t>报错「缺少 manifest」通常是选错层级——请选到含 manifest.json 的那层文件夹。</a:t>
+              <a:t>报错「缺少 manifest」= 选错层级，请选到含 manifest.json 的那层文件夹。</a:t>
+            </a:r>
+          </a:p>
+        </p:txBody>
+      </p:sp>
+      <p:sp>
+        <p:nvSpPr>
+          <p:cNvPr id="17" name="TextBox 16"/>
+          <p:cNvSpPr txBox="1"/>
+          <p:nvPr/>
+        </p:nvSpPr>
+        <p:spPr>
+          <a:xfrm>
+            <a:off x="10881360" y="6400800"/>
+            <a:ext cx="914400" cy="365760"/>
+          </a:xfrm>
+          <a:prstGeom prst="rect">
+            <a:avLst/>
+          </a:prstGeom>
+          <a:noFill/>
+        </p:spPr>
+        <p:txBody>
+          <a:bodyPr wrap="square" lIns="0" rIns="0" tIns="0" bIns="0">
+            <a:spAutoFit/>
+          </a:bodyPr>
+          <a:lstStyle/>
+          <a:p>
+            <a:pPr algn="r"/>
+            <a:r>
+              <a:rPr sz="1000" b="1" i="0">
+                <a:solidFill>
+                  <a:srgbClr val="C9A85F"/>
+                </a:solidFill>
+                <a:latin typeface="Times New Roman"/>
+                <a:ea typeface="Times New Roman"/>
+              </a:rPr>
+              <a:t>06</a:t>
             </a:r>
           </a:p>
         </p:txBody>
@@ -7968,8 +9403,8 @@
         </p:nvSpPr>
         <p:spPr>
           <a:xfrm>
-            <a:off x="566928" y="457200"/>
-            <a:ext cx="5486400" cy="457200"/>
+            <a:off x="566928" y="384048"/>
+            <a:ext cx="6400800" cy="457200"/>
           </a:xfrm>
           <a:prstGeom prst="rect">
             <a:avLst/>
@@ -8033,7 +9468,7 @@
         </p:nvCxnSpPr>
         <p:spPr>
           <a:xfrm>
-            <a:off x="566928" y="1051560"/>
+            <a:off x="566928" y="1024128"/>
             <a:ext cx="11064239" cy="0"/>
           </a:xfrm>
           <a:prstGeom prst="bentConnector3">
@@ -8068,8 +9503,8 @@
         </p:nvSpPr>
         <p:spPr>
           <a:xfrm>
-            <a:off x="566928" y="1234440"/>
-            <a:ext cx="10607040" cy="457200"/>
+            <a:off x="566928" y="1188720"/>
+            <a:ext cx="10607040" cy="365760"/>
           </a:xfrm>
           <a:prstGeom prst="rect">
             <a:avLst/>
@@ -8103,8 +9538,8 @@
         </p:nvSpPr>
         <p:spPr>
           <a:xfrm>
-            <a:off x="566928" y="1600200"/>
-            <a:ext cx="10607040" cy="822960"/>
+            <a:off x="566928" y="1536192"/>
+            <a:ext cx="10607040" cy="731520"/>
           </a:xfrm>
           <a:prstGeom prst="rect">
             <a:avLst/>
@@ -8118,7 +9553,7 @@
           <a:lstStyle/>
           <a:p>
             <a:r>
-              <a:rPr sz="3000" b="1" i="0">
+              <a:rPr sz="2800" b="1" i="0">
                 <a:solidFill>
                   <a:srgbClr val="F2E9D6"/>
                 </a:solidFill>
@@ -8138,8 +9573,8 @@
         </p:nvSpPr>
         <p:spPr>
           <a:xfrm>
-            <a:off x="640080" y="2697480"/>
-            <a:ext cx="384048" cy="384048"/>
+            <a:off x="640080" y="2514600"/>
+            <a:ext cx="365760" cy="365760"/>
           </a:xfrm>
           <a:prstGeom prst="ellipse">
             <a:avLst/>
@@ -8172,7 +9607,7 @@
           <a:p>
             <a:pPr algn="ctr"/>
             <a:r>
-              <a:rPr sz="1500" b="1" i="0">
+              <a:rPr sz="1400" b="1" i="0">
                 <a:solidFill>
                   <a:srgbClr val="18110E"/>
                 </a:solidFill>
@@ -8192,8 +9627,8 @@
         </p:nvSpPr>
         <p:spPr>
           <a:xfrm>
-            <a:off x="1234440" y="2642616"/>
-            <a:ext cx="10241280" cy="822960"/>
+            <a:off x="1188720" y="2468880"/>
+            <a:ext cx="10332720" cy="914400"/>
           </a:xfrm>
           <a:prstGeom prst="rect">
             <a:avLst/>
@@ -8207,24 +9642,24 @@
           <a:lstStyle/>
           <a:p>
             <a:r>
-              <a:rPr sz="1600" b="1" i="0">
+              <a:rPr sz="1500" b="1" i="0">
                 <a:solidFill>
                   <a:srgbClr val="F2E9D6"/>
                 </a:solidFill>
                 <a:latin typeface="Microsoft YaHei"/>
                 <a:ea typeface="Microsoft YaHei"/>
               </a:rPr>
-              <a:t>点浏览器扩展栏拼图图标 🧩</a:t>
+              <a:t>点扩展栏拼图图标 🧩</a:t>
             </a:r>
           </a:p>
           <a:p>
             <a:pPr>
               <a:lnSpc>
-                <a:spcPct val="125000"/>
+                <a:spcPct val="120000"/>
               </a:lnSpc>
             </a:pPr>
             <a:r>
-              <a:rPr sz="1300" b="0" i="0">
+              <a:rPr sz="1200" b="0" i="0">
                 <a:solidFill>
                   <a:srgbClr val="C3B498"/>
                 </a:solidFill>
@@ -8244,8 +9679,8 @@
         </p:nvSpPr>
         <p:spPr>
           <a:xfrm>
-            <a:off x="640080" y="3566160"/>
-            <a:ext cx="384048" cy="384048"/>
+            <a:off x="640080" y="3355848"/>
+            <a:ext cx="365760" cy="365760"/>
           </a:xfrm>
           <a:prstGeom prst="ellipse">
             <a:avLst/>
@@ -8278,7 +9713,7 @@
           <a:p>
             <a:pPr algn="ctr"/>
             <a:r>
-              <a:rPr sz="1500" b="1" i="0">
+              <a:rPr sz="1400" b="1" i="0">
                 <a:solidFill>
                   <a:srgbClr val="18110E"/>
                 </a:solidFill>
@@ -8298,8 +9733,8 @@
         </p:nvSpPr>
         <p:spPr>
           <a:xfrm>
-            <a:off x="1234440" y="3511296"/>
-            <a:ext cx="10241280" cy="822960"/>
+            <a:off x="1188720" y="3310128"/>
+            <a:ext cx="10332720" cy="914400"/>
           </a:xfrm>
           <a:prstGeom prst="rect">
             <a:avLst/>
@@ -8313,7 +9748,7 @@
           <a:lstStyle/>
           <a:p>
             <a:r>
-              <a:rPr sz="1600" b="1" i="0">
+              <a:rPr sz="1500" b="1" i="0">
                 <a:solidFill>
                   <a:srgbClr val="F2E9D6"/>
                 </a:solidFill>
@@ -8326,18 +9761,54 @@
           <a:p>
             <a:pPr>
               <a:lnSpc>
-                <a:spcPct val="125000"/>
+                <a:spcPct val="120000"/>
               </a:lnSpc>
             </a:pPr>
             <a:r>
-              <a:rPr sz="1300" b="0" i="0">
+              <a:rPr sz="1200" b="0" i="0">
                 <a:solidFill>
                   <a:srgbClr val="C3B498"/>
                 </a:solidFill>
                 <a:latin typeface="Microsoft YaHei"/>
                 <a:ea typeface="Microsoft YaHei"/>
               </a:rPr>
-              <a:t>插件会自动读取当前登录态，无需重复输入。</a:t>
+              <a:t>插件自动读取登录态，无需重复输入。</a:t>
+            </a:r>
+          </a:p>
+        </p:txBody>
+      </p:sp>
+      <p:sp>
+        <p:nvSpPr>
+          <p:cNvPr id="11" name="TextBox 10"/>
+          <p:cNvSpPr txBox="1"/>
+          <p:nvPr/>
+        </p:nvSpPr>
+        <p:spPr>
+          <a:xfrm>
+            <a:off x="10881360" y="6400800"/>
+            <a:ext cx="914400" cy="365760"/>
+          </a:xfrm>
+          <a:prstGeom prst="rect">
+            <a:avLst/>
+          </a:prstGeom>
+          <a:noFill/>
+        </p:spPr>
+        <p:txBody>
+          <a:bodyPr wrap="square" lIns="0" rIns="0" tIns="0" bIns="0">
+            <a:spAutoFit/>
+          </a:bodyPr>
+          <a:lstStyle/>
+          <a:p>
+            <a:pPr algn="r"/>
+            <a:r>
+              <a:rPr sz="1000" b="1" i="0">
+                <a:solidFill>
+                  <a:srgbClr val="C9A85F"/>
+                </a:solidFill>
+                <a:latin typeface="Times New Roman"/>
+                <a:ea typeface="Times New Roman"/>
+              </a:rPr>
+              <a:t>07</a:t>
             </a:r>
           </a:p>
         </p:txBody>
@@ -8412,8 +9883,8 @@
         </p:nvSpPr>
         <p:spPr>
           <a:xfrm>
-            <a:off x="566928" y="457200"/>
-            <a:ext cx="5486400" cy="457200"/>
+            <a:off x="566928" y="384048"/>
+            <a:ext cx="6400800" cy="457200"/>
           </a:xfrm>
           <a:prstGeom prst="rect">
             <a:avLst/>
@@ -8477,7 +9948,7 @@
         </p:nvCxnSpPr>
         <p:spPr>
           <a:xfrm>
-            <a:off x="566928" y="1051560"/>
+            <a:off x="566928" y="1024128"/>
             <a:ext cx="11064239" cy="0"/>
           </a:xfrm>
           <a:prstGeom prst="bentConnector3">
@@ -8512,8 +9983,8 @@
         </p:nvSpPr>
         <p:spPr>
           <a:xfrm>
-            <a:off x="566928" y="1234440"/>
-            <a:ext cx="10607040" cy="457200"/>
+            <a:off x="566928" y="1188720"/>
+            <a:ext cx="10607040" cy="365760"/>
           </a:xfrm>
           <a:prstGeom prst="rect">
             <a:avLst/>
@@ -8547,8 +10018,8 @@
         </p:nvSpPr>
         <p:spPr>
           <a:xfrm>
-            <a:off x="566928" y="1600200"/>
-            <a:ext cx="10607040" cy="822960"/>
+            <a:off x="566928" y="1536192"/>
+            <a:ext cx="10607040" cy="731520"/>
           </a:xfrm>
           <a:prstGeom prst="rect">
             <a:avLst/>
@@ -8562,7 +10033,7 @@
           <a:lstStyle/>
           <a:p>
             <a:r>
-              <a:rPr sz="3000" b="1" i="0">
+              <a:rPr sz="2800" b="1" i="0">
                 <a:solidFill>
                   <a:srgbClr val="F2E9D6"/>
                 </a:solidFill>
@@ -8582,8 +10053,8 @@
         </p:nvSpPr>
         <p:spPr>
           <a:xfrm>
-            <a:off x="640080" y="2697480"/>
-            <a:ext cx="384048" cy="384048"/>
+            <a:off x="640080" y="2514600"/>
+            <a:ext cx="365760" cy="365760"/>
           </a:xfrm>
           <a:prstGeom prst="ellipse">
             <a:avLst/>
@@ -8616,7 +10087,7 @@
           <a:p>
             <a:pPr algn="ctr"/>
             <a:r>
-              <a:rPr sz="1500" b="1" i="0">
+              <a:rPr sz="1400" b="1" i="0">
                 <a:solidFill>
                   <a:srgbClr val="18110E"/>
                 </a:solidFill>
@@ -8636,8 +10107,8 @@
         </p:nvSpPr>
         <p:spPr>
           <a:xfrm>
-            <a:off x="1234440" y="2642616"/>
-            <a:ext cx="10241280" cy="822960"/>
+            <a:off x="1188720" y="2468880"/>
+            <a:ext cx="5029200" cy="914400"/>
           </a:xfrm>
           <a:prstGeom prst="rect">
             <a:avLst/>
@@ -8651,7 +10122,7 @@
           <a:lstStyle/>
           <a:p>
             <a:r>
-              <a:rPr sz="1600" b="1" i="0">
+              <a:rPr sz="1500" b="1" i="0">
                 <a:solidFill>
                   <a:srgbClr val="F2E9D6"/>
                 </a:solidFill>
@@ -8664,18 +10135,18 @@
           <a:p>
             <a:pPr>
               <a:lnSpc>
-                <a:spcPct val="125000"/>
+                <a:spcPct val="120000"/>
               </a:lnSpc>
             </a:pPr>
             <a:r>
-              <a:rPr sz="1300" b="0" i="0">
+              <a:rPr sz="1200" b="0" i="0">
                 <a:solidFill>
                   <a:srgbClr val="C3B498"/>
                 </a:solidFill>
                 <a:latin typeface="Microsoft YaHei"/>
                 <a:ea typeface="Microsoft YaHei"/>
               </a:rPr>
-              <a:t>打开插件弹窗。</a:t>
+              <a:t>打开插件弹窗（见右图）。</a:t>
             </a:r>
           </a:p>
         </p:txBody>
@@ -8688,8 +10159,8 @@
         </p:nvSpPr>
         <p:spPr>
           <a:xfrm>
-            <a:off x="640080" y="3566160"/>
-            <a:ext cx="384048" cy="384048"/>
+            <a:off x="640080" y="3355848"/>
+            <a:ext cx="365760" cy="365760"/>
           </a:xfrm>
           <a:prstGeom prst="ellipse">
             <a:avLst/>
@@ -8722,7 +10193,7 @@
           <a:p>
             <a:pPr algn="ctr"/>
             <a:r>
-              <a:rPr sz="1500" b="1" i="0">
+              <a:rPr sz="1400" b="1" i="0">
                 <a:solidFill>
                   <a:srgbClr val="18110E"/>
                 </a:solidFill>
@@ -8742,8 +10213,8 @@
         </p:nvSpPr>
         <p:spPr>
           <a:xfrm>
-            <a:off x="1234440" y="3511296"/>
-            <a:ext cx="10241280" cy="822960"/>
+            <a:off x="1188720" y="3310128"/>
+            <a:ext cx="5029200" cy="914400"/>
           </a:xfrm>
           <a:prstGeom prst="rect">
             <a:avLst/>
@@ -8757,31 +10228,31 @@
           <a:lstStyle/>
           <a:p>
             <a:r>
-              <a:rPr sz="1600" b="1" i="0">
+              <a:rPr sz="1500" b="1" i="0">
                 <a:solidFill>
                   <a:srgbClr val="F2E9D6"/>
                 </a:solidFill>
                 <a:latin typeface="Microsoft YaHei"/>
                 <a:ea typeface="Microsoft YaHei"/>
               </a:rPr>
-              <a:t>打开「本机作为执行设备」开关</a:t>
+              <a:t>开「本机作为执行设备」</a:t>
             </a:r>
           </a:p>
           <a:p>
             <a:pPr>
               <a:lnSpc>
-                <a:spcPct val="125000"/>
+                <a:spcPct val="120000"/>
               </a:lnSpc>
             </a:pPr>
             <a:r>
-              <a:rPr sz="1300" b="0" i="0">
+              <a:rPr sz="1200" b="0" i="0">
                 <a:solidFill>
                   <a:srgbClr val="C3B498"/>
                 </a:solidFill>
                 <a:latin typeface="Microsoft YaHei"/>
                 <a:ea typeface="Microsoft YaHei"/>
               </a:rPr>
-              <a:t>本机就会出现在「设备看板」里，状态=休息中。</a:t>
+              <a:t>本机即出现在「设备看板」，状态=休息中。</a:t>
             </a:r>
           </a:p>
         </p:txBody>
@@ -8794,8 +10265,8 @@
         </p:nvSpPr>
         <p:spPr>
           <a:xfrm>
-            <a:off x="640080" y="4434840"/>
-            <a:ext cx="384048" cy="384048"/>
+            <a:off x="640080" y="4197096"/>
+            <a:ext cx="365760" cy="365760"/>
           </a:xfrm>
           <a:prstGeom prst="ellipse">
             <a:avLst/>
@@ -8828,7 +10299,7 @@
           <a:p>
             <a:pPr algn="ctr"/>
             <a:r>
-              <a:rPr sz="1500" b="1" i="0">
+              <a:rPr sz="1400" b="1" i="0">
                 <a:solidFill>
                   <a:srgbClr val="18110E"/>
                 </a:solidFill>
@@ -8848,8 +10319,8 @@
         </p:nvSpPr>
         <p:spPr>
           <a:xfrm>
-            <a:off x="1234440" y="4379976"/>
-            <a:ext cx="10241280" cy="822960"/>
+            <a:off x="1188720" y="4151376"/>
+            <a:ext cx="5029200" cy="914400"/>
           </a:xfrm>
           <a:prstGeom prst="rect">
             <a:avLst/>
@@ -8863,31 +10334,137 @@
           <a:lstStyle/>
           <a:p>
             <a:r>
-              <a:rPr sz="1600" b="1" i="0">
+              <a:rPr sz="1500" b="1" i="0">
                 <a:solidFill>
                   <a:srgbClr val="F2E9D6"/>
                 </a:solidFill>
                 <a:latin typeface="Microsoft YaHei"/>
                 <a:ea typeface="Microsoft YaHei"/>
               </a:rPr>
-              <a:t>打开「前台观看模式」</a:t>
+              <a:t>开「前台观看模式」</a:t>
             </a:r>
           </a:p>
           <a:p>
             <a:pPr>
               <a:lnSpc>
-                <a:spcPct val="125000"/>
+                <a:spcPct val="120000"/>
               </a:lnSpc>
             </a:pPr>
             <a:r>
-              <a:rPr sz="1300" b="0" i="0">
+              <a:rPr sz="1200" b="0" i="0">
                 <a:solidFill>
                   <a:srgbClr val="C3B498"/>
                 </a:solidFill>
                 <a:latin typeface="Microsoft YaHei"/>
                 <a:ea typeface="Microsoft YaHei"/>
               </a:rPr>
-              <a:t>可在前台看到自动操作过程，更放心（可选）。</a:t>
+              <a:t>可前台看到自动操作过程，更放心（可选）。</a:t>
+            </a:r>
+          </a:p>
+        </p:txBody>
+      </p:sp>
+      <p:sp>
+        <p:nvSpPr>
+          <p:cNvPr id="13" name="Rectangle 12"/>
+          <p:cNvSpPr/>
+          <p:nvPr/>
+        </p:nvSpPr>
+        <p:spPr>
+          <a:xfrm>
+            <a:off x="7756724" y="2414016"/>
+            <a:ext cx="2591670" cy="3767328"/>
+          </a:xfrm>
+          <a:prstGeom prst="rect">
+            <a:avLst/>
+          </a:prstGeom>
+          <a:solidFill>
+            <a:srgbClr val="241B16"/>
+          </a:solidFill>
+          <a:ln w="12700">
+            <a:solidFill>
+              <a:srgbClr val="C9A85F"/>
+            </a:solidFill>
+          </a:ln>
+          <a:effectLst/>
+        </p:spPr>
+        <p:style>
+          <a:lnRef idx="1">
+            <a:schemeClr val="accent1"/>
+          </a:lnRef>
+          <a:fillRef idx="3">
+            <a:schemeClr val="accent1"/>
+          </a:fillRef>
+          <a:effectRef idx="2">
+            <a:schemeClr val="accent1"/>
+          </a:effectRef>
+          <a:fontRef idx="minor">
+            <a:schemeClr val="lt1"/>
+          </a:fontRef>
+        </p:style>
+        <p:txBody>
+          <a:bodyPr rtlCol="0" anchor="ctr"/>
+          <a:lstStyle/>
+          <a:p>
+            <a:pPr algn="ctr"/>
+          </a:p>
+        </p:txBody>
+      </p:sp>
+      <p:pic>
+        <p:nvPicPr>
+          <p:cNvPr id="14" name="Picture 13" descr="s_popup.png"/>
+          <p:cNvPicPr>
+            <a:picLocks noChangeAspect="1"/>
+          </p:cNvPicPr>
+          <p:nvPr/>
+        </p:nvPicPr>
+        <p:blipFill>
+          <a:blip r:embed="rId2"/>
+          <a:stretch>
+            <a:fillRect/>
+          </a:stretch>
+        </p:blipFill>
+        <p:spPr>
+          <a:xfrm>
+            <a:off x="7811588" y="2468880"/>
+            <a:ext cx="2481942" cy="3657600"/>
+          </a:xfrm>
+          <a:prstGeom prst="rect">
+            <a:avLst/>
+          </a:prstGeom>
+        </p:spPr>
+      </p:pic>
+      <p:sp>
+        <p:nvSpPr>
+          <p:cNvPr id="15" name="TextBox 14"/>
+          <p:cNvSpPr txBox="1"/>
+          <p:nvPr/>
+        </p:nvSpPr>
+        <p:spPr>
+          <a:xfrm>
+            <a:off x="10881360" y="6400800"/>
+            <a:ext cx="914400" cy="365760"/>
+          </a:xfrm>
+          <a:prstGeom prst="rect">
+            <a:avLst/>
+          </a:prstGeom>
+          <a:noFill/>
+        </p:spPr>
+        <p:txBody>
+          <a:bodyPr wrap="square" lIns="0" rIns="0" tIns="0" bIns="0">
+            <a:spAutoFit/>
+          </a:bodyPr>
+          <a:lstStyle/>
+          <a:p>
+            <a:pPr algn="r"/>
+            <a:r>
+              <a:rPr sz="1000" b="1" i="0">
+                <a:solidFill>
+                  <a:srgbClr val="C9A85F"/>
+                </a:solidFill>
+                <a:latin typeface="Times New Roman"/>
+                <a:ea typeface="Times New Roman"/>
+              </a:rPr>
+              <a:t>08</a:t>
             </a:r>
           </a:p>
         </p:txBody>

--- a/downloads/朱砂助手插件安装教程.pptx
+++ b/downloads/朱砂助手插件安装教程.pptx
@@ -6907,7 +6907,7 @@
         <p:spPr>
           <a:xfrm>
             <a:off x="1188720" y="2468880"/>
-            <a:ext cx="10332720" cy="914400"/>
+            <a:ext cx="5029200" cy="914400"/>
           </a:xfrm>
           <a:prstGeom prst="rect">
             <a:avLst/>
@@ -7013,7 +7013,7 @@
         <p:spPr>
           <a:xfrm>
             <a:off x="1188720" y="3310128"/>
-            <a:ext cx="10332720" cy="914400"/>
+            <a:ext cx="5029200" cy="914400"/>
           </a:xfrm>
           <a:prstGeom prst="rect">
             <a:avLst/>
@@ -7119,7 +7119,7 @@
         <p:spPr>
           <a:xfrm>
             <a:off x="1188720" y="4151376"/>
-            <a:ext cx="10332720" cy="914400"/>
+            <a:ext cx="5029200" cy="914400"/>
           </a:xfrm>
           <a:prstGeom prst="rect">
             <a:avLst/>
@@ -7170,8 +7170,8 @@
         </p:nvSpPr>
         <p:spPr>
           <a:xfrm>
-            <a:off x="566928" y="5943600"/>
-            <a:ext cx="11064240" cy="548640"/>
+            <a:off x="6391656" y="3594771"/>
+            <a:ext cx="5321808" cy="1405817"/>
           </a:xfrm>
           <a:prstGeom prst="rect">
             <a:avLst/>
@@ -7208,9 +7208,79 @@
           </a:p>
         </p:txBody>
       </p:sp>
-      <p:sp>
-        <p:nvSpPr>
-          <p:cNvPr id="14" name="TextBox 13"/>
+      <p:pic>
+        <p:nvPicPr>
+          <p:cNvPr id="14" name="Picture 13" descr="s_help_dl.png"/>
+          <p:cNvPicPr>
+            <a:picLocks noChangeAspect="1"/>
+          </p:cNvPicPr>
+          <p:nvPr/>
+        </p:nvPicPr>
+        <p:blipFill>
+          <a:blip r:embed="rId2"/>
+          <a:stretch>
+            <a:fillRect/>
+          </a:stretch>
+        </p:blipFill>
+        <p:spPr>
+          <a:xfrm>
+            <a:off x="6446520" y="3649635"/>
+            <a:ext cx="5212080" cy="1296089"/>
+          </a:xfrm>
+          <a:prstGeom prst="rect">
+            <a:avLst/>
+          </a:prstGeom>
+        </p:spPr>
+      </p:pic>
+      <p:sp>
+        <p:nvSpPr>
+          <p:cNvPr id="15" name="Rectangle 14"/>
+          <p:cNvSpPr/>
+          <p:nvPr/>
+        </p:nvSpPr>
+        <p:spPr>
+          <a:xfrm>
+            <a:off x="566928" y="5943600"/>
+            <a:ext cx="11064240" cy="548640"/>
+          </a:xfrm>
+          <a:prstGeom prst="rect">
+            <a:avLst/>
+          </a:prstGeom>
+          <a:solidFill>
+            <a:srgbClr val="241B16"/>
+          </a:solidFill>
+          <a:ln w="12700">
+            <a:solidFill>
+              <a:srgbClr val="C9A85F"/>
+            </a:solidFill>
+          </a:ln>
+          <a:effectLst/>
+        </p:spPr>
+        <p:style>
+          <a:lnRef idx="1">
+            <a:schemeClr val="accent1"/>
+          </a:lnRef>
+          <a:fillRef idx="3">
+            <a:schemeClr val="accent1"/>
+          </a:fillRef>
+          <a:effectRef idx="2">
+            <a:schemeClr val="accent1"/>
+          </a:effectRef>
+          <a:fontRef idx="minor">
+            <a:schemeClr val="lt1"/>
+          </a:fontRef>
+        </p:style>
+        <p:txBody>
+          <a:bodyPr rtlCol="0" anchor="ctr"/>
+          <a:lstStyle/>
+          <a:p>
+            <a:pPr algn="ctr"/>
+          </a:p>
+        </p:txBody>
+      </p:sp>
+      <p:sp>
+        <p:nvSpPr>
+          <p:cNvPr id="16" name="TextBox 15"/>
           <p:cNvSpPr txBox="1"/>
           <p:nvPr/>
         </p:nvSpPr>
@@ -7255,7 +7325,7 @@
       </p:sp>
       <p:sp>
         <p:nvSpPr>
-          <p:cNvPr id="15" name="TextBox 14"/>
+          <p:cNvPr id="17" name="TextBox 16"/>
           <p:cNvSpPr txBox="1"/>
           <p:nvPr/>
         </p:nvSpPr>
@@ -7847,8 +7917,8 @@
         </p:nvSpPr>
         <p:spPr>
           <a:xfrm>
-            <a:off x="6391656" y="2726574"/>
-            <a:ext cx="5321808" cy="3142210"/>
+            <a:off x="6391656" y="2679192"/>
+            <a:ext cx="5321808" cy="3236976"/>
           </a:xfrm>
           <a:prstGeom prst="rect">
             <a:avLst/>
@@ -7887,7 +7957,7 @@
       </p:sp>
       <p:pic>
         <p:nvPicPr>
-          <p:cNvPr id="14" name="Picture 13" descr="m_ext.png"/>
+          <p:cNvPr id="14" name="Picture 13" descr="r_ext.png"/>
           <p:cNvPicPr>
             <a:picLocks noChangeAspect="1"/>
           </p:cNvPicPr>
@@ -7901,8 +7971,8 @@
         </p:blipFill>
         <p:spPr>
           <a:xfrm>
-            <a:off x="6446520" y="2781438"/>
-            <a:ext cx="5212080" cy="3032482"/>
+            <a:off x="6446520" y="2734056"/>
+            <a:ext cx="5212080" cy="3127248"/>
           </a:xfrm>
           <a:prstGeom prst="rect">
             <a:avLst/>
@@ -8397,8 +8467,8 @@
         </p:nvSpPr>
         <p:spPr>
           <a:xfrm>
-            <a:off x="6391656" y="2726574"/>
-            <a:ext cx="5321808" cy="3142210"/>
+            <a:off x="6391656" y="2679192"/>
+            <a:ext cx="5321808" cy="3236976"/>
           </a:xfrm>
           <a:prstGeom prst="rect">
             <a:avLst/>
@@ -8437,7 +8507,7 @@
       </p:sp>
       <p:pic>
         <p:nvPicPr>
-          <p:cNvPr id="12" name="Picture 11" descr="m_ext.png"/>
+          <p:cNvPr id="12" name="Picture 11" descr="r_ext.png"/>
           <p:cNvPicPr>
             <a:picLocks noChangeAspect="1"/>
           </p:cNvPicPr>
@@ -8451,8 +8521,8 @@
         </p:blipFill>
         <p:spPr>
           <a:xfrm>
-            <a:off x="6446520" y="2781438"/>
-            <a:ext cx="5212080" cy="3032482"/>
+            <a:off x="6446520" y="2734056"/>
+            <a:ext cx="5212080" cy="3127248"/>
           </a:xfrm>
           <a:prstGeom prst="rect">
             <a:avLst/>

--- a/downloads/朱砂助手插件安装教程.pptx
+++ b/downloads/朱砂助手插件安装教程.pptx
@@ -3944,8 +3944,8 @@
         </p:nvSpPr>
         <p:spPr>
           <a:xfrm>
-            <a:off x="6656832" y="2414016"/>
-            <a:ext cx="4791456" cy="3767328"/>
+            <a:off x="6936884" y="2414016"/>
+            <a:ext cx="4231351" cy="3767328"/>
           </a:xfrm>
           <a:prstGeom prst="rect">
             <a:avLst/>
@@ -3998,8 +3998,8 @@
         </p:blipFill>
         <p:spPr>
           <a:xfrm>
-            <a:off x="6711696" y="2468880"/>
-            <a:ext cx="4681728" cy="3657600"/>
+            <a:off x="6991748" y="2468880"/>
+            <a:ext cx="4121623" cy="3657600"/>
           </a:xfrm>
           <a:prstGeom prst="rect">
             <a:avLst/>
@@ -4691,8 +4691,8 @@
         </p:nvSpPr>
         <p:spPr>
           <a:xfrm>
-            <a:off x="6396736" y="2414016"/>
-            <a:ext cx="5311648" cy="3767328"/>
+            <a:off x="6533628" y="2414016"/>
+            <a:ext cx="5037862" cy="3767328"/>
           </a:xfrm>
           <a:prstGeom prst="rect">
             <a:avLst/>
@@ -4745,8 +4745,8 @@
         </p:blipFill>
         <p:spPr>
           <a:xfrm>
-            <a:off x="6451600" y="2468880"/>
-            <a:ext cx="5201920" cy="3657600"/>
+            <a:off x="6588492" y="2468880"/>
+            <a:ext cx="4928134" cy="3657600"/>
           </a:xfrm>
           <a:prstGeom prst="rect">
             <a:avLst/>
